--- a/1-WHY_FAMILY/1-Why-Family.pptx
+++ b/1-WHY_FAMILY/1-Why-Family.pptx
@@ -176,7 +176,7 @@
           <a:bodyPr vert="horz" lIns="91440" tIns="45720" rIns="91440" bIns="45720" rtlCol="0"/>
           <a:lstStyle>
             <a:lvl1pPr algn="l">
-              <a:defRPr sz="1200"/>
+              <a:defRPr sz="4200"/>
             </a:lvl1pPr>
           </a:lstStyle>
           <a:p>
@@ -207,7 +207,7 @@
           <a:bodyPr vert="horz" lIns="91440" tIns="45720" rIns="91440" bIns="45720" rtlCol="0"/>
           <a:lstStyle>
             <a:lvl1pPr algn="r">
-              <a:defRPr sz="1200"/>
+              <a:defRPr sz="4200"/>
             </a:lvl1pPr>
           </a:lstStyle>
           <a:p>
@@ -334,7 +334,7 @@
           <a:bodyPr vert="horz" lIns="91440" tIns="45720" rIns="91440" bIns="45720" rtlCol="0" anchor="b"/>
           <a:lstStyle>
             <a:lvl1pPr algn="l">
-              <a:defRPr sz="1200"/>
+              <a:defRPr sz="4200"/>
             </a:lvl1pPr>
           </a:lstStyle>
           <a:p>
@@ -365,7 +365,7 @@
           <a:bodyPr vert="horz" lIns="91440" tIns="45720" rIns="91440" bIns="45720" rtlCol="0" anchor="b"/>
           <a:lstStyle>
             <a:lvl1pPr algn="r">
-              <a:defRPr sz="1200"/>
+              <a:defRPr sz="4200"/>
             </a:lvl1pPr>
           </a:lstStyle>
           <a:p>
@@ -387,7 +387,7 @@
   <p:clrMap bg1="lt1" tx1="dk1" bg2="lt2" tx2="dk2" accent1="accent1" accent2="accent2" accent3="accent3" accent4="accent4" accent5="accent5" accent6="accent6" hlink="hlink" folHlink="folHlink"/>
   <p:notesStyle>
     <a:lvl1pPr marL="0" algn="l" defTabSz="914400" rtl="0" eaLnBrk="1" latinLnBrk="0" hangingPunct="1">
-      <a:defRPr sz="1200" kern="1200">
+      <a:defRPr sz="4200" kern="1200">
         <a:solidFill>
           <a:schemeClr val="tx1"/>
         </a:solidFill>
@@ -397,7 +397,7 @@
       </a:defRPr>
     </a:lvl1pPr>
     <a:lvl2pPr marL="457200" algn="l" defTabSz="914400" rtl="0" eaLnBrk="1" latinLnBrk="0" hangingPunct="1">
-      <a:defRPr sz="1200" kern="1200">
+      <a:defRPr sz="4200" kern="1200">
         <a:solidFill>
           <a:schemeClr val="tx1"/>
         </a:solidFill>
@@ -407,7 +407,7 @@
       </a:defRPr>
     </a:lvl2pPr>
     <a:lvl3pPr marL="914400" algn="l" defTabSz="914400" rtl="0" eaLnBrk="1" latinLnBrk="0" hangingPunct="1">
-      <a:defRPr sz="1200" kern="1200">
+      <a:defRPr sz="4200" kern="1200">
         <a:solidFill>
           <a:schemeClr val="tx1"/>
         </a:solidFill>
@@ -417,7 +417,7 @@
       </a:defRPr>
     </a:lvl3pPr>
     <a:lvl4pPr marL="1371600" algn="l" defTabSz="914400" rtl="0" eaLnBrk="1" latinLnBrk="0" hangingPunct="1">
-      <a:defRPr sz="1200" kern="1200">
+      <a:defRPr sz="4200" kern="1200">
         <a:solidFill>
           <a:schemeClr val="tx1"/>
         </a:solidFill>
@@ -427,7 +427,7 @@
       </a:defRPr>
     </a:lvl4pPr>
     <a:lvl5pPr marL="1828800" algn="l" defTabSz="914400" rtl="0" eaLnBrk="1" latinLnBrk="0" hangingPunct="1">
-      <a:defRPr sz="1200" kern="1200">
+      <a:defRPr sz="4200" kern="1200">
         <a:solidFill>
           <a:schemeClr val="tx1"/>
         </a:solidFill>
@@ -437,7 +437,7 @@
       </a:defRPr>
     </a:lvl5pPr>
     <a:lvl6pPr marL="2286000" algn="l" defTabSz="914400" rtl="0" eaLnBrk="1" latinLnBrk="0" hangingPunct="1">
-      <a:defRPr sz="1200" kern="1200">
+      <a:defRPr sz="4200" kern="1200">
         <a:solidFill>
           <a:schemeClr val="tx1"/>
         </a:solidFill>
@@ -447,7 +447,7 @@
       </a:defRPr>
     </a:lvl6pPr>
     <a:lvl7pPr marL="2743200" algn="l" defTabSz="914400" rtl="0" eaLnBrk="1" latinLnBrk="0" hangingPunct="1">
-      <a:defRPr sz="1200" kern="1200">
+      <a:defRPr sz="4200" kern="1200">
         <a:solidFill>
           <a:schemeClr val="tx1"/>
         </a:solidFill>
@@ -457,7 +457,7 @@
       </a:defRPr>
     </a:lvl7pPr>
     <a:lvl8pPr marL="3200400" algn="l" defTabSz="914400" rtl="0" eaLnBrk="1" latinLnBrk="0" hangingPunct="1">
-      <a:defRPr sz="1200" kern="1200">
+      <a:defRPr sz="4200" kern="1200">
         <a:solidFill>
           <a:schemeClr val="tx1"/>
         </a:solidFill>
@@ -467,7 +467,7 @@
       </a:defRPr>
     </a:lvl8pPr>
     <a:lvl9pPr marL="3657600" algn="l" defTabSz="914400" rtl="0" eaLnBrk="1" latinLnBrk="0" hangingPunct="1">
-      <a:defRPr sz="1200" kern="1200">
+      <a:defRPr sz="4200" kern="1200">
         <a:solidFill>
           <a:schemeClr val="tx1"/>
         </a:solidFill>
@@ -525,10 +525,21 @@
           <a:lstStyle/>
           <a:p>
             <a:r>
-              <a:rPr lang="en-US" dirty="0"/>
-              <a:t/>
-            </a:r>
-            <a:endParaRPr lang="en-US" dirty="0"/>
+              <a:rPr sz="4200"/>
+              <a:t>TITLE SLIDE</a:t>
+            </a:r>
+          </a:p>
+          <a:p>
+            <a:r>
+              <a:rPr sz="4200"/>
+              <a:t>"Why Family? The State of Behavioral Health"</a:t>
+            </a:r>
+          </a:p>
+          <a:p>
+            <a:r>
+              <a:rPr sz="4200"/>
+              <a:t>Presentation 1 of 5. Sets up the scientific problems in behavioral health field.</a:t>
+            </a:r>
           </a:p>
         </p:txBody>
       </p:sp>
@@ -613,10 +624,33 @@
           <a:lstStyle/>
           <a:p>
             <a:r>
-              <a:rPr lang="en-US" dirty="0"/>
-              <a:t/>
-            </a:r>
-            <a:endParaRPr lang="en-US" dirty="0"/>
+              <a:rPr sz="4200"/>
+              <a:t>SALEM WITCH TRIALS (1692)</a:t>
+            </a:r>
+          </a:p>
+          <a:p>
+            <a:r>
+              <a:rPr sz="4200"/>
+              <a:t>The Belief: Witches identifiable by symptoms and accusations.</a:t>
+            </a:r>
+          </a:p>
+          <a:p>
+            <a:r>
+              <a:rPr sz="4200"/>
+              <a:t>The Evidence: Spectral evidence, fits, accusations.</a:t>
+            </a:r>
+          </a:p>
+          <a:p>
+            <a:r>
+              <a:rPr sz="4200"/>
+              <a:t>The Outcome: 25+ dead, 200+ accused, families destroyed.</a:t>
+            </a:r>
+          </a:p>
+          <a:p>
+            <a:r>
+              <a:rPr sz="4200"/>
+              <a:t>The End: Within years, jurors signed public apologies.</a:t>
+            </a:r>
           </a:p>
         </p:txBody>
       </p:sp>
@@ -701,10 +735,45 @@
           <a:lstStyle/>
           <a:p>
             <a:r>
-              <a:rPr lang="en-US" dirty="0"/>
-              <a:t/>
-            </a:r>
-            <a:endParaRPr lang="en-US" dirty="0"/>
+              <a:rPr sz="4200"/>
+              <a:t>LOBOTOMY EPIDEMIC (1940s-1950s)</a:t>
+            </a:r>
+          </a:p>
+          <a:p>
+            <a:r>
+              <a:rPr sz="4200"/>
+              <a:t>The Belief: Mental illness cured by severing brain connections.</a:t>
+            </a:r>
+          </a:p>
+          <a:p>
+            <a:r>
+              <a:rPr sz="4200"/>
+              <a:t>The Evidence: Patients seemed "calmer."</a:t>
+            </a:r>
+          </a:p>
+          <a:p>
+            <a:r>
+              <a:rPr sz="4200"/>
+              <a:t>50,000+ lobotomies in the US. ~5% mortality rate. Thousands permanently damaged.</a:t>
+            </a:r>
+          </a:p>
+          <a:p>
+            <a:r>
+              <a:rPr sz="4200"/>
+              <a:t>Walter Freeman performed 4,000 personally—on patients as young as 4.</a:t>
+            </a:r>
+          </a:p>
+          <a:p>
+            <a:r>
+              <a:rPr sz="4200"/>
+              <a:t>Rosemary Kennedy permanently incapacitated.</a:t>
+            </a:r>
+          </a:p>
+          <a:p>
+            <a:r>
+              <a:rPr sz="4200"/>
+              <a:t>Freeman celebrated—until banned. Soviet Union banned it in 1950.</a:t>
+            </a:r>
           </a:p>
         </p:txBody>
       </p:sp>
@@ -789,10 +858,33 @@
           <a:lstStyle/>
           <a:p>
             <a:r>
-              <a:rPr lang="en-US" dirty="0"/>
-              <a:t/>
-            </a:r>
-            <a:endParaRPr lang="en-US" dirty="0"/>
+              <a:rPr sz="4200"/>
+              <a:t>REFRIGERATOR MOTHER THEORY (1950s-1970s)</a:t>
+            </a:r>
+          </a:p>
+          <a:p>
+            <a:r>
+              <a:rPr sz="4200"/>
+              <a:t>The Belief: Autism caused by cold, unloving mothers.</a:t>
+            </a:r>
+          </a:p>
+          <a:p>
+            <a:r>
+              <a:rPr sz="4200"/>
+              <a:t>The Evidence: Psychoanalytic interpretation.</a:t>
+            </a:r>
+          </a:p>
+          <a:p>
+            <a:r>
+              <a:rPr sz="4200"/>
+              <a:t>20 years blaming mothers. Immense guilt. Children institutionalized.</a:t>
+            </a:r>
+          </a:p>
+          <a:p>
+            <a:r>
+              <a:rPr sz="4200"/>
+              <a:t>Bettelheim (main proponent) exposed as fraud who lied about credentials and abused patients.</a:t>
+            </a:r>
           </a:p>
         </p:txBody>
       </p:sp>
@@ -877,10 +969,39 @@
           <a:lstStyle/>
           <a:p>
             <a:r>
-              <a:rPr lang="en-US" dirty="0"/>
-              <a:t/>
-            </a:r>
-            <a:endParaRPr lang="en-US" dirty="0"/>
+              <a:rPr sz="4200"/>
+              <a:t>RECOVERED MEMORY THERAPY (1980s-1990s)</a:t>
+            </a:r>
+          </a:p>
+          <a:p>
+            <a:r>
+              <a:rPr sz="4200"/>
+              <a:t>The Belief: Repressed memories recoverable through therapy.</a:t>
+            </a:r>
+          </a:p>
+          <a:p>
+            <a:r>
+              <a:rPr sz="4200"/>
+              <a:t>The Evidence: Patients "remembered" under guidance.</a:t>
+            </a:r>
+          </a:p>
+          <a:p>
+            <a:r>
+              <a:rPr sz="4200"/>
+              <a:t>Est. 1 million patients convinced they had repressed memories.</a:t>
+            </a:r>
+          </a:p>
+          <a:p>
+            <a:r>
+              <a:rPr sz="4200"/>
+              <a:t>"Tens of thousands of families" destroyed. People imprisoned on false accusations.</a:t>
+            </a:r>
+          </a:p>
+          <a:p>
+            <a:r>
+              <a:rPr sz="4200"/>
+              <a:t>Malpractice suits, license revocations. FBI found zero evidence of satanic abuse.</a:t>
+            </a:r>
           </a:p>
         </p:txBody>
       </p:sp>
@@ -965,10 +1086,21 @@
           <a:lstStyle/>
           <a:p>
             <a:r>
-              <a:rPr lang="en-US" dirty="0"/>
-              <a:t/>
-            </a:r>
-            <a:endParaRPr lang="en-US" dirty="0"/>
+              <a:rPr sz="4200"/>
+              <a:t>SATANIC PANIC / DAYCARE ABUSE + MPD/DID EPIDEMIC (1980s-1990s)</a:t>
+            </a:r>
+          </a:p>
+          <a:p>
+            <a:r>
+              <a:rPr sz="4200"/>
+              <a:t>Satanic Panic: 12,000+ cases alleged. McMartin: 7 years, $15M, zero convictions. FBI found no evidence.</a:t>
+            </a:r>
+          </a:p>
+          <a:p>
+            <a:r>
+              <a:rPr sz="4200"/>
+              <a:t>MPD/DID: 50,000 diagnoses by 1990s (vs. ~200 in all prior history). Patients got worse. Largely iatrogenic—created by the therapy. Epidemic disappeared when practices stopped.</a:t>
+            </a:r>
           </a:p>
         </p:txBody>
       </p:sp>
@@ -1053,10 +1185,15 @@
           <a:lstStyle/>
           <a:p>
             <a:r>
-              <a:rPr lang="en-US" dirty="0"/>
-              <a:t/>
-            </a:r>
-            <a:endParaRPr lang="en-US" dirty="0"/>
+              <a:rPr sz="4200"/>
+              <a:t>THE COMMON PATTERN</a:t>
+            </a:r>
+          </a:p>
+          <a:p>
+            <a:r>
+              <a:rPr sz="4200"/>
+              <a:t>All cases share: No objective evidence, no way to test validity, emotion as the glue (fear, care, outrage), spread through professionals, ended in calamity.</a:t>
+            </a:r>
           </a:p>
         </p:txBody>
       </p:sp>
@@ -1141,10 +1278,39 @@
           <a:lstStyle/>
           <a:p>
             <a:r>
-              <a:rPr lang="en-US" dirty="0"/>
-              <a:t/>
-            </a:r>
-            <a:endParaRPr lang="en-US" dirty="0"/>
+              <a:rPr sz="4200"/>
+              <a:t>WHAT ABOUT NOW?</a:t>
+            </a:r>
+          </a:p>
+          <a:p>
+            <a:r>
+              <a:rPr sz="4200"/>
+              <a:t>"I want to pause and invite you to wonder: What social contagions might be happening right now? What topics feel off-limits to question? What beliefs are held with such emotional intensity that questioning them makes you suspect?"</a:t>
+            </a:r>
+          </a:p>
+          <a:p>
+            <a:r>
+              <a:rPr sz="4200"/>
+              <a:t>"I'm not going to name them. You can think of your own."</a:t>
+            </a:r>
+          </a:p>
+          <a:p>
+            <a:r>
+              <a:rPr sz="4200"/>
+              <a:t>"But I want to be clear: I have deep respect for the power of these forces. They are not to be taken lightly. They are not an invitation to convenient rebellion."</a:t>
+            </a:r>
+          </a:p>
+          <a:p>
+            <a:r>
+              <a:rPr sz="4200"/>
+              <a:t>"These forces are real. They serve a function—I believe a biological function. The question is not whether they exist, but whether we can recognize them and respond more thoughtfully than our ancestors did."</a:t>
+            </a:r>
+          </a:p>
+          <a:p>
+            <a:r>
+              <a:rPr sz="4200"/>
+              <a:t>Transition: "Which brings us to: Why does this keep happening?"</a:t>
+            </a:r>
           </a:p>
         </p:txBody>
       </p:sp>
@@ -1229,10 +1395,15 @@
           <a:lstStyle/>
           <a:p>
             <a:r>
-              <a:rPr lang="en-US" dirty="0"/>
-              <a:t/>
-            </a:r>
-            <a:endParaRPr lang="en-US" dirty="0"/>
+              <a:rPr sz="4200"/>
+              <a:t>SECTION IV: WHY THIS KEEPS HAPPENING (12 min)</a:t>
+            </a:r>
+          </a:p>
+          <a:p>
+            <a:r>
+              <a:rPr sz="4200"/>
+              <a:t>This section covers the anxiety mechanism that drives these contagions.</a:t>
+            </a:r>
           </a:p>
         </p:txBody>
       </p:sp>
@@ -1317,10 +1488,84 @@
           <a:lstStyle/>
           <a:p>
             <a:r>
-              <a:rPr lang="en-US" dirty="0"/>
-              <a:t/>
-            </a:r>
-            <a:endParaRPr lang="en-US" dirty="0"/>
+              <a:rPr sz="4200"/>
+              <a:t>ANXIETY = PERCEIVED UNCERTAINTY + URGENCY</a:t>
+            </a:r>
+          </a:p>
+          <a:p>
+            <a:r>
+              <a:rPr sz="4200"/>
+              <a:t>Core concept (the "A" in SARF): Anxiety occurs when people perceive uncertainty combined with urgency.</a:t>
+            </a:r>
+          </a:p>
+          <a:p>
+            <a:r>
+              <a:rPr sz="4200"/>
+              <a:t>When anxious, the first thing people do is look for a way to reduce uncertainty. Any explanation feels better than no explanation.</a:t>
+            </a:r>
+          </a:p>
+          <a:p/>
+          <a:p>
+            <a:r>
+              <a:rPr sz="4200"/>
+              <a:t>THE IDEOLOGY PROVIDES RELIEF:</a:t>
+            </a:r>
+          </a:p>
+          <a:p>
+            <a:r>
+              <a:rPr sz="4200"/>
+              <a:t>What all contagions have in common—they offer an explanation that is:</a:t>
+            </a:r>
+          </a:p>
+          <a:p>
+            <a:r>
+              <a:rPr sz="4200"/>
+              <a:t>1. Untestable (unassailable—you can't prove it wrong)</a:t>
+            </a:r>
+          </a:p>
+          <a:p>
+            <a:r>
+              <a:rPr sz="4200"/>
+              <a:t>2. Simple (but oversimplified)</a:t>
+            </a:r>
+          </a:p>
+          <a:p>
+            <a:r>
+              <a:rPr sz="4200"/>
+              <a:t>This cuts the uncertainty. People perceive uncertainty has gone away. They calm down.</a:t>
+            </a:r>
+          </a:p>
+          <a:p>
+            <a:r>
+              <a:rPr sz="4200"/>
+              <a:t>"The ideology provides psychological relief. The believers feel better. That's why it spreads."</a:t>
+            </a:r>
+          </a:p>
+          <a:p/>
+          <a:p>
+            <a:r>
+              <a:rPr sz="4200"/>
+              <a:t>Short-term: ideology solves the suffering of anxiety for believers.</a:t>
+            </a:r>
+          </a:p>
+          <a:p>
+            <a:r>
+              <a:rPr sz="4200"/>
+              <a:t>Long-term: it obscures the true problem—which is that these problems aren't well understood.</a:t>
+            </a:r>
+          </a:p>
+          <a:p>
+            <a:r>
+              <a:rPr sz="4200"/>
+              <a:t>The anxious response creates more damage than the original problem.</a:t>
+            </a:r>
+          </a:p>
+          <a:p/>
+          <a:p>
+            <a:r>
+              <a:rPr sz="4200"/>
+              <a:t>Band-aid analogy: One person applies a band-aid calmly. Another runs screaming, breaks furniture, spouse leaves the stove on, burns the house down.</a:t>
+            </a:r>
           </a:p>
         </p:txBody>
       </p:sp>
@@ -1405,10 +1650,73 @@
           <a:lstStyle/>
           <a:p>
             <a:r>
-              <a:rPr lang="en-US" dirty="0"/>
-              <a:t/>
-            </a:r>
-            <a:endParaRPr lang="en-US" dirty="0"/>
+              <a:rPr sz="4200"/>
+              <a:t>CAMBRIDGE-SOMERVILLE YOUTH STUDY</a:t>
+            </a:r>
+          </a:p>
+          <a:p>
+            <a:r>
+              <a:rPr sz="4200"/>
+              <a:t>506 boys, matched pairs, random assignment. Treatment: counseling, mentorship, summer camp, caring adults.</a:t>
+            </a:r>
+          </a:p>
+          <a:p>
+            <a:r>
+              <a:rPr sz="4200"/>
+              <a:t>30-year result: treatment group had more criminal offending, more alcohol abuse, more mental illness, lower job satisfaction, earlier death.</a:t>
+            </a:r>
+          </a:p>
+          <a:p/>
+          <a:p>
+            <a:r>
+              <a:rPr sz="4200"/>
+              <a:t>Joan McCord: "No one had ever discussed the possibility that intervention... that there is any potential for harmful effects."</a:t>
+            </a:r>
+          </a:p>
+          <a:p>
+            <a:r>
+              <a:rPr sz="4200"/>
+              <a:t>"Unless social programs are evaluated for potential harm as well as benefit, safety as well as efficacy, the choice of which social programs to use will remain a dangerous guess."</a:t>
+            </a:r>
+          </a:p>
+          <a:p/>
+          <a:p>
+            <a:r>
+              <a:rPr sz="4200"/>
+              <a:t>Also: DARE (80% of schools, no effect), Scared Straight (kids did worse).</a:t>
+            </a:r>
+          </a:p>
+          <a:p>
+            <a:r>
+              <a:rPr sz="4200"/>
+              <a:t>Key line: "Caring isn't enough. Without measurement, caring can hurt."</a:t>
+            </a:r>
+          </a:p>
+          <a:p/>
+          <a:p>
+            <a:r>
+              <a:rPr sz="4200"/>
+              <a:t>WHY CARING PROFESSIONS ARE ESPECIALLY VULNERABLE:</a:t>
+            </a:r>
+          </a:p>
+          <a:p>
+            <a:r>
+              <a:rPr sz="4200"/>
+              <a:t>Caring professions attract people who want to help. Suffering creates urgency. Uncertainty about what works is intolerable. Any framework that promises clarity is appealing. Questioning the framework feels like abandoning the suffering.</a:t>
+            </a:r>
+          </a:p>
+          <a:p/>
+          <a:p>
+            <a:r>
+              <a:rPr sz="4200"/>
+              <a:t>WITHOUT MEASUREMENT, SOCIAL DYNAMICS RULE:</a:t>
+            </a:r>
+          </a:p>
+          <a:p>
+            <a:r>
+              <a:rPr sz="4200"/>
+              <a:t>Concepts spread based on who promotes them, how they feel, what's socially safe to say. Once belief sets in, questioning makes you a heretic. Traditional perspectives that emphasize autonomy/accountability become unmentionable.</a:t>
+            </a:r>
           </a:p>
         </p:txBody>
       </p:sp>
@@ -1493,10 +1801,39 @@
           <a:lstStyle/>
           <a:p>
             <a:r>
-              <a:rPr lang="en-US" dirty="0"/>
-              <a:t/>
-            </a:r>
-            <a:endParaRPr lang="en-US" dirty="0"/>
+              <a:rPr sz="4200"/>
+              <a:t>SECTION I: THE ENGINEER'S CONFESSION (3 min)</a:t>
+            </a:r>
+          </a:p>
+          <a:p>
+            <a:r>
+              <a:rPr sz="4200"/>
+              <a:t>Your story: engineer enters behavioral health field.</a:t>
+            </a:r>
+          </a:p>
+          <a:p>
+            <a:r>
+              <a:rPr sz="4200"/>
+              <a:t>Expected: if it doesn't work, measure it, fix it, or discard it.</a:t>
+            </a:r>
+          </a:p>
+          <a:p>
+            <a:r>
+              <a:rPr sz="4200"/>
+              <a:t>Found: a field that doesn't work that way.</a:t>
+            </a:r>
+          </a:p>
+          <a:p>
+            <a:r>
+              <a:rPr sz="4200"/>
+              <a:t>"I'm not here to attack anyone's training. I'm here to make a case that everyone—not just engineers—needs scientific thinking."</a:t>
+            </a:r>
+          </a:p>
+          <a:p>
+            <a:r>
+              <a:rPr sz="4200"/>
+              <a:t>Transition: "Let me show you the data."</a:t>
+            </a:r>
           </a:p>
         </p:txBody>
       </p:sp>
@@ -1581,10 +1918,21 @@
           <a:lstStyle/>
           <a:p>
             <a:r>
-              <a:rPr lang="en-US" dirty="0"/>
-              <a:t/>
-            </a:r>
-            <a:endParaRPr lang="en-US" dirty="0"/>
+              <a:rPr sz="4200"/>
+              <a:t>SECTION V: THE PROPOSAL (13 min)</a:t>
+            </a:r>
+          </a:p>
+          <a:p>
+            <a:r>
+              <a:rPr sz="4200"/>
+              <a:t>Scientific thinking is the antidote. The willingness to be falsified.</a:t>
+            </a:r>
+          </a:p>
+          <a:p>
+            <a:r>
+              <a:rPr sz="4200"/>
+              <a:t>"A field that doesn't ask 'what if we're wrong?' will eventually be wrong in catastrophic ways."</a:t>
+            </a:r>
           </a:p>
         </p:txBody>
       </p:sp>
@@ -1669,10 +2017,27 @@
           <a:lstStyle/>
           <a:p>
             <a:r>
-              <a:rPr lang="en-US" dirty="0"/>
-              <a:t/>
-            </a:r>
-            <a:endParaRPr lang="en-US" dirty="0"/>
+              <a:rPr sz="4200"/>
+              <a:t>THE BLADE OF GRASS</a:t>
+            </a:r>
+          </a:p>
+          <a:p>
+            <a:r>
+              <a:rPr sz="4200"/>
+              <a:t>Studying a blade of grass to understand why it bends. Measuring angle, position, structure. Still can't predict movement.</a:t>
+            </a:r>
+          </a:p>
+          <a:p>
+            <a:r>
+              <a:rPr sz="4200"/>
+              <a:t>Because the grass isn't the phenomenon. The wind is.</a:t>
+            </a:r>
+          </a:p>
+          <a:p>
+            <a:r>
+              <a:rPr sz="4200"/>
+              <a:t>"We've spent 80 years studying individuals. The pattern is in the system."</a:t>
+            </a:r>
           </a:p>
         </p:txBody>
       </p:sp>
@@ -1757,10 +2122,27 @@
           <a:lstStyle/>
           <a:p>
             <a:r>
-              <a:rPr lang="en-US" dirty="0"/>
-              <a:t/>
-            </a:r>
-            <a:endParaRPr lang="en-US" dirty="0"/>
+              <a:rPr sz="4200"/>
+              <a:t>WHY FAMILY?</a:t>
+            </a:r>
+          </a:p>
+          <a:p>
+            <a:r>
+              <a:rPr sz="4200"/>
+              <a:t>Family is the smallest system where the pattern is visible.</a:t>
+            </a:r>
+          </a:p>
+          <a:p>
+            <a:r>
+              <a:rPr sz="4200"/>
+              <a:t>Not society (too big, can't intervene). Not the individual (misses the pattern).</a:t>
+            </a:r>
+          </a:p>
+          <a:p>
+            <a:r>
+              <a:rPr sz="4200"/>
+              <a:t>One level up from the blade of grass.</a:t>
+            </a:r>
           </a:p>
         </p:txBody>
       </p:sp>
@@ -1845,10 +2227,34 @@
           <a:lstStyle/>
           <a:p>
             <a:r>
-              <a:rPr lang="en-US" dirty="0"/>
-              <a:t/>
-            </a:r>
-            <a:endParaRPr lang="en-US" dirty="0"/>
+              <a:rPr sz="4200"/>
+              <a:t>FACTS CALM PEOPLE DOWN</a:t>
+            </a:r>
+          </a:p>
+          <a:p>
+            <a:r>
+              <a:rPr sz="4200"/>
+              <a:t>The Common Currency Argument: Everyone knows what a dollar is → global markets. Without common currency → barter → no coordination.</a:t>
+            </a:r>
+          </a:p>
+          <a:p>
+            <a:r>
+              <a:rPr sz="4200"/>
+              <a:t>Without measurable concepts → opinion vs. opinion → loudest voice wins.</a:t>
+            </a:r>
+          </a:p>
+          <a:p/>
+          <a:p>
+            <a:r>
+              <a:rPr sz="4200"/>
+              <a:t>First move in family therapy: gather facts. What is a fact? Something everyone can easily agree on. Facts establish a depolarized baseline.</a:t>
+            </a:r>
+          </a:p>
+          <a:p>
+            <a:r>
+              <a:rPr sz="4200"/>
+              <a:t>"Measurability provides a healthier way to reduce uncertainty than ideology. Facts calm people down without the catastrophic side effects."</a:t>
+            </a:r>
           </a:p>
         </p:txBody>
       </p:sp>
@@ -1933,10 +2339,39 @@
           <a:lstStyle/>
           <a:p>
             <a:r>
-              <a:rPr lang="en-US" dirty="0"/>
-              <a:t/>
-            </a:r>
-            <a:endParaRPr lang="en-US" dirty="0"/>
+              <a:rPr sz="4200"/>
+              <a:t>WHAT YOU'LL GET TODAY</a:t>
+            </a:r>
+          </a:p>
+          <a:p>
+            <a:r>
+              <a:rPr sz="4200"/>
+              <a:t>Preview of the day's remaining sessions:</a:t>
+            </a:r>
+          </a:p>
+          <a:p>
+            <a:r>
+              <a:rPr sz="4200"/>
+              <a:t>- SARF: Measurable concepts for family-level patterns—including "A" for anxiety</a:t>
+            </a:r>
+          </a:p>
+          <a:p>
+            <a:r>
+              <a:rPr sz="4200"/>
+              <a:t>- AI Tools: Technology to capture what we're learning to see</a:t>
+            </a:r>
+          </a:p>
+          <a:p>
+            <a:r>
+              <a:rPr sz="4200"/>
+              <a:t>- App Demo: Practical tools you can use Monday</a:t>
+            </a:r>
+          </a:p>
+          <a:p>
+            <a:r>
+              <a:rPr sz="4200"/>
+              <a:t>- Clinical Case: Evidence it works</a:t>
+            </a:r>
           </a:p>
         </p:txBody>
       </p:sp>
@@ -2021,10 +2456,52 @@
           <a:lstStyle/>
           <a:p>
             <a:r>
-              <a:rPr lang="en-US" dirty="0"/>
-              <a:t/>
-            </a:r>
-            <a:endParaRPr lang="en-US" dirty="0"/>
+              <a:rPr sz="4200"/>
+              <a:t>CLOSING / CALL TO ACTION</a:t>
+            </a:r>
+          </a:p>
+          <a:p>
+            <a:r>
+              <a:rPr sz="4200"/>
+              <a:t>"Everyone needs scientific thinking."</a:t>
+            </a:r>
+          </a:p>
+          <a:p>
+            <a:r>
+              <a:rPr sz="4200"/>
+              <a:t>"Before your next intake, draw the family."</a:t>
+            </a:r>
+          </a:p>
+          <a:p>
+            <a:r>
+              <a:rPr sz="4200"/>
+              <a:t>"Before your next intervention, ask: how would I know if this is making things worse?"</a:t>
+            </a:r>
+          </a:p>
+          <a:p/>
+          <a:p>
+            <a:r>
+              <a:rPr sz="4200"/>
+              <a:t>Q&amp;A follows (10 min). Likely questions:</a:t>
+            </a:r>
+          </a:p>
+          <a:p>
+            <a:r>
+              <a:rPr sz="4200"/>
+              <a:t>- "Are you saying therapy doesn't work?"</a:t>
+            </a:r>
+          </a:p>
+          <a:p>
+            <a:r>
+              <a:rPr sz="4200"/>
+              <a:t>- "What about individual factors like genetics?"</a:t>
+            </a:r>
+          </a:p>
+          <a:p>
+            <a:r>
+              <a:rPr sz="4200"/>
+              <a:t>- "How do I apply scientific thinking without being a researcher?"</a:t>
+            </a:r>
           </a:p>
         </p:txBody>
       </p:sp>
@@ -2109,10 +2586,21 @@
           <a:lstStyle/>
           <a:p>
             <a:r>
-              <a:rPr lang="en-US" dirty="0"/>
-              <a:t/>
-            </a:r>
-            <a:endParaRPr lang="en-US" dirty="0"/>
+              <a:rPr sz="4200"/>
+              <a:t>SECTION II: THE FIELD IS BROKEN (8 min)</a:t>
+            </a:r>
+          </a:p>
+          <a:p>
+            <a:r>
+              <a:rPr sz="4200"/>
+              <a:t>This section presents the data showing the field is broken.</a:t>
+            </a:r>
+          </a:p>
+          <a:p>
+            <a:r>
+              <a:rPr sz="4200"/>
+              <a:t>Scope note: "I'll be speaking in the context of clinical psychology since it's a formalized domain with the most concrete examples. But these patterns apply across all helping professions—LCSW, LPC, MFT, and others."</a:t>
+            </a:r>
           </a:p>
         </p:txBody>
       </p:sp>
@@ -2197,10 +2685,39 @@
           <a:lstStyle/>
           <a:p>
             <a:r>
-              <a:rPr lang="en-US" dirty="0"/>
-              <a:t/>
-            </a:r>
-            <a:endParaRPr lang="en-US" dirty="0"/>
+              <a:rPr sz="4200"/>
+              <a:t>THE TREATMENT-PREVALENCE PARADOX (Centerpiece)</a:t>
+            </a:r>
+          </a:p>
+          <a:p>
+            <a:r>
+              <a:rPr sz="4200"/>
+              <a:t>Source: Ormel et al. (2022)</a:t>
+            </a:r>
+          </a:p>
+          <a:p>
+            <a:r>
+              <a:rPr sz="4200"/>
+              <a:t>Treatment for depression increased 4x from 1987-2007.</a:t>
+            </a:r>
+          </a:p>
+          <a:p>
+            <a:r>
+              <a:rPr sz="4200"/>
+              <a:t>Prevalence of depression: stayed the same or increased.</a:t>
+            </a:r>
+          </a:p>
+          <a:p>
+            <a:r>
+              <a:rPr sz="4200"/>
+              <a:t>Researchers' conclusion: "Significant prevalence reduction requires not only better treatment but foremost long-term structurally funded prevention targeting powerful determinants."</a:t>
+            </a:r>
+          </a:p>
+          <a:p>
+            <a:r>
+              <a:rPr sz="4200"/>
+              <a:t>Key line: "More treatment does not mean less depression."</a:t>
+            </a:r>
           </a:p>
         </p:txBody>
       </p:sp>
@@ -2285,10 +2802,33 @@
           <a:lstStyle/>
           <a:p>
             <a:r>
-              <a:rPr lang="en-US" dirty="0"/>
-              <a:t/>
-            </a:r>
-            <a:endParaRPr lang="en-US" dirty="0"/>
+              <a:rPr sz="4200"/>
+              <a:t>THE RELAPSE PROBLEM</a:t>
+            </a:r>
+          </a:p>
+          <a:p>
+            <a:r>
+              <a:rPr sz="4200"/>
+              <a:t>Sources: BMC Psychiatry, BJGP</a:t>
+            </a:r>
+          </a:p>
+          <a:p>
+            <a:r>
+              <a:rPr sz="4200"/>
+              <a:t>After first episode: 50% relapse. After second: 70%. After third: 90%.</a:t>
+            </a:r>
+          </a:p>
+          <a:p>
+            <a:r>
+              <a:rPr sz="4200"/>
+              <a:t>85% recurrence within a decade. 79% of relapses within first 6 months.</a:t>
+            </a:r>
+          </a:p>
+          <a:p>
+            <a:r>
+              <a:rPr sz="4200"/>
+              <a:t>Key line: "The fire keeps getting relit."</a:t>
+            </a:r>
           </a:p>
         </p:txBody>
       </p:sp>
@@ -2373,10 +2913,45 @@
           <a:lstStyle/>
           <a:p>
             <a:r>
-              <a:rPr lang="en-US" dirty="0"/>
-              <a:t/>
-            </a:r>
-            <a:endParaRPr lang="en-US" dirty="0"/>
+              <a:rPr sz="4200"/>
+              <a:t>THE YOUTH CRISIS</a:t>
+            </a:r>
+          </a:p>
+          <a:p>
+            <a:r>
+              <a:rPr sz="4200"/>
+              <a:t>Sources: CDC MMWR 2023, JED Foundation</a:t>
+            </a:r>
+          </a:p>
+          <a:p>
+            <a:r>
+              <a:rPr sz="4200"/>
+              <a:t>Teen depression: 145% increase (2010-2021).</a:t>
+            </a:r>
+          </a:p>
+          <a:p>
+            <a:r>
+              <a:rPr sz="4200"/>
+              <a:t>Suicide deaths ages 10-24: 62% increase (2007-2021).</a:t>
+            </a:r>
+          </a:p>
+          <a:p>
+            <a:r>
+              <a:rPr sz="4200"/>
+              <a:t>1 in 5 high school students seriously considered suicide in 2023.</a:t>
+            </a:r>
+          </a:p>
+          <a:p>
+            <a:r>
+              <a:rPr sz="4200"/>
+              <a:t>Preteen suicide (ages 8+): 8.2% annual increase (2008-2022).</a:t>
+            </a:r>
+          </a:p>
+          <a:p>
+            <a:r>
+              <a:rPr sz="4200"/>
+              <a:t>More therapists, more spending, more awareness than ever.</a:t>
+            </a:r>
           </a:p>
         </p:txBody>
       </p:sp>
@@ -2461,10 +3036,39 @@
           <a:lstStyle/>
           <a:p>
             <a:r>
-              <a:rPr lang="en-US" dirty="0"/>
-              <a:t/>
-            </a:r>
-            <a:endParaRPr lang="en-US" dirty="0"/>
+              <a:rPr sz="4200"/>
+              <a:t>THE REPLICATION CRISIS + INSTITUTIONAL LOSS OF CONFIDENCE</a:t>
+            </a:r>
+          </a:p>
+          <a:p>
+            <a:r>
+              <a:rPr sz="4200"/>
+              <a:t>Source: Northwestern IPR</a:t>
+            </a:r>
+          </a:p>
+          <a:p>
+            <a:r>
+              <a:rPr sz="4200"/>
+              <a:t>~40% of psychology studies replicate. "The research base itself is unreliable."</a:t>
+            </a:r>
+          </a:p>
+          <a:p>
+            <a:r>
+              <a:rPr sz="4200"/>
+              <a:t>NIMH stopped funding DSM-only research (2013).</a:t>
+            </a:r>
+          </a:p>
+          <a:p>
+            <a:r>
+              <a:rPr sz="4200"/>
+              <a:t>Thomas Insel: DSM diagnoses are "consensus about clusters of clinical symptoms, not any objective laboratory measure."</a:t>
+            </a:r>
+          </a:p>
+          <a:p>
+            <a:r>
+              <a:rPr sz="4200"/>
+              <a:t>"The field's own institutions have lost confidence in its diagnostic framework."</a:t>
+            </a:r>
           </a:p>
         </p:txBody>
       </p:sp>
@@ -2549,10 +3153,45 @@
           <a:lstStyle/>
           <a:p>
             <a:r>
-              <a:rPr lang="en-US" dirty="0"/>
-              <a:t/>
-            </a:r>
-            <a:endParaRPr lang="en-US" dirty="0"/>
+              <a:rPr sz="4200"/>
+              <a:t>PUBLIC SKEPTICISM</a:t>
+            </a:r>
+          </a:p>
+          <a:p>
+            <a:r>
+              <a:rPr sz="4200"/>
+              <a:t>Source: Roper Center / Psychology Today polls</a:t>
+            </a:r>
+          </a:p>
+          <a:p>
+            <a:r>
+              <a:rPr sz="4200"/>
+              <a:t>43% say costs of therapy outweigh benefits (2004).</a:t>
+            </a:r>
+          </a:p>
+          <a:p>
+            <a:r>
+              <a:rPr sz="4200"/>
+              <a:t>38% believe most therapists need therapy themselves (2004).</a:t>
+            </a:r>
+          </a:p>
+          <a:p>
+            <a:r>
+              <a:rPr sz="4200"/>
+              <a:t>Public perceives therapy effective in only 26-50% of cases.</a:t>
+            </a:r>
+          </a:p>
+          <a:p>
+            <a:r>
+              <a:rPr sz="4200"/>
+              <a:t>"The public senses something is wrong—even if they can't articulate it. This skepticism has a basis."</a:t>
+            </a:r>
+          </a:p>
+          <a:p>
+            <a:r>
+              <a:rPr sz="4200"/>
+              <a:t>Transition: "How does a field stay broken this long? Let me show you a pattern."</a:t>
+            </a:r>
           </a:p>
         </p:txBody>
       </p:sp>
@@ -2637,10 +3276,15 @@
           <a:lstStyle/>
           <a:p>
             <a:r>
-              <a:rPr lang="en-US" dirty="0"/>
-              <a:t/>
-            </a:r>
-            <a:endParaRPr lang="en-US" dirty="0"/>
+              <a:rPr sz="4200"/>
+              <a:t>SECTION III: HISTORICAL CATASTROPHES (14 min)</a:t>
+            </a:r>
+          </a:p>
+          <a:p>
+            <a:r>
+              <a:rPr sz="4200"/>
+              <a:t>Setup: These aren't ancient history. These are cases where caring professionals, lacking objective frameworks, got swept up in collective beliefs that destroyed lives. The pattern repeats because the conditions repeat.</a:t>
+            </a:r>
           </a:p>
         </p:txBody>
       </p:sp>

--- a/1-WHY_FAMILY/1-Why-Family.pptx
+++ b/1-WHY_FAMILY/1-Why-Family.pptx
@@ -538,7 +538,20 @@
           <a:p>
             <a:r>
               <a:rPr sz="4200"/>
-              <a:t>Presentation 1 of 5. Sets up the scientific problems in behavioral health field.</a:t>
+              <a:t>Dr. Patrick Stinson — Alaska Family Systems</a:t>
+            </a:r>
+          </a:p>
+          <a:p>
+            <a:r>
+              <a:rPr sz="4200"/>
+              <a:t>Presentation 1 of 5, FFRN Conference Feb 28, 2025</a:t>
+            </a:r>
+          </a:p>
+          <a:p/>
+          <a:p>
+            <a:r>
+              <a:rPr sz="4200"/>
+              <a:t>"I'll be speaking in the context of clinical psychology since it's a formalized domain with the most concrete examples. But these patterns apply across all helping professions—LCSW, LPC, MFT, and others."</a:t>
             </a:r>
           </a:p>
         </p:txBody>
@@ -625,31 +638,21 @@
           <a:p>
             <a:r>
               <a:rPr sz="4200"/>
-              <a:t>SALEM WITCH TRIALS (1692)</a:t>
-            </a:r>
-          </a:p>
+              <a:t>SECTION IV: HISTORICAL CATASTROPHES (14 min)</a:t>
+            </a:r>
+          </a:p>
+          <a:p/>
           <a:p>
             <a:r>
               <a:rPr sz="4200"/>
-              <a:t>The Belief: Witches identifiable by symptoms and accusations.</a:t>
-            </a:r>
-          </a:p>
+              <a:t>Setup: These aren't ancient history. These are cases where caring professionals, lacking objective frameworks, got swept up in collective beliefs that destroyed lives. The pattern repeats because the conditions repeat.</a:t>
+            </a:r>
+          </a:p>
+          <a:p/>
           <a:p>
             <a:r>
               <a:rPr sz="4200"/>
-              <a:t>The Evidence: Spectral evidence, fits, accusations.</a:t>
-            </a:r>
-          </a:p>
-          <a:p>
-            <a:r>
-              <a:rPr sz="4200"/>
-              <a:t>The Outcome: 25+ dead, 200+ accused, families destroyed.</a:t>
-            </a:r>
-          </a:p>
-          <a:p>
-            <a:r>
-              <a:rPr sz="4200"/>
-              <a:t>The End: Within years, jurors signed public apologies.</a:t>
+              <a:t>For each case, note the structure: The Belief, The Evidence, The Outcome.</a:t>
             </a:r>
           </a:p>
         </p:txBody>
@@ -736,43 +739,28 @@
           <a:p>
             <a:r>
               <a:rPr sz="4200"/>
-              <a:t>LOBOTOMY EPIDEMIC (1940s-1950s)</a:t>
-            </a:r>
-          </a:p>
+              <a:t>SALEM WITCH TRIALS (1692)</a:t>
+            </a:r>
+          </a:p>
+          <a:p/>
           <a:p>
             <a:r>
               <a:rPr sz="4200"/>
-              <a:t>The Belief: Mental illness cured by severing brain connections.</a:t>
-            </a:r>
-          </a:p>
+              <a:t>THE BELIEF: Witches are identifiable by symptoms and accusations. Supernatural forces explain community afflictions.</a:t>
+            </a:r>
+          </a:p>
+          <a:p/>
           <a:p>
             <a:r>
               <a:rPr sz="4200"/>
-              <a:t>The Evidence: Patients seemed "calmer."</a:t>
-            </a:r>
-          </a:p>
+              <a:t>THE EVIDENCE: Spectral evidence — visions, fits, accusations from afflicted girls. No physical evidence. No objective test. Testimony of the accusers was sufficient.</a:t>
+            </a:r>
+          </a:p>
+          <a:p/>
           <a:p>
             <a:r>
               <a:rPr sz="4200"/>
-              <a:t>50,000+ lobotomies in the US. ~5% mortality rate. Thousands permanently damaged.</a:t>
-            </a:r>
-          </a:p>
-          <a:p>
-            <a:r>
-              <a:rPr sz="4200"/>
-              <a:t>Walter Freeman performed 4,000 personally—on patients as young as 4.</a:t>
-            </a:r>
-          </a:p>
-          <a:p>
-            <a:r>
-              <a:rPr sz="4200"/>
-              <a:t>Rosemary Kennedy permanently incapacitated.</a:t>
-            </a:r>
-          </a:p>
-          <a:p>
-            <a:r>
-              <a:rPr sz="4200"/>
-              <a:t>Freeman celebrated—until banned. Soviet Union banned it in 1950.</a:t>
+              <a:t>THE OUTCOME: 25+ dead, 200+ accused, families destroyed. Within years, jurors signed public apologies. The court that convicted them was dissolved.</a:t>
             </a:r>
           </a:p>
         </p:txBody>
@@ -859,31 +847,28 @@
           <a:p>
             <a:r>
               <a:rPr sz="4200"/>
-              <a:t>REFRIGERATOR MOTHER THEORY (1950s-1970s)</a:t>
-            </a:r>
-          </a:p>
+              <a:t>LOBOTOMY EPIDEMIC (1940s-1950s)</a:t>
+            </a:r>
+          </a:p>
+          <a:p/>
           <a:p>
             <a:r>
               <a:rPr sz="4200"/>
-              <a:t>The Belief: Autism caused by cold, unloving mothers.</a:t>
-            </a:r>
-          </a:p>
+              <a:t>THE BELIEF: Mental illness can be cured by severing connections in the brain. The frontal lobe is the seat of the problem.</a:t>
+            </a:r>
+          </a:p>
+          <a:p/>
           <a:p>
             <a:r>
               <a:rPr sz="4200"/>
-              <a:t>The Evidence: Psychoanalytic interpretation.</a:t>
-            </a:r>
-          </a:p>
+              <a:t>THE EVIDENCE: Patients seemed "calmer" after the procedure. No controlled studies. No long-term outcome tracking. Freeman personally performed 4,000 — on patients as young as 4.</a:t>
+            </a:r>
+          </a:p>
+          <a:p/>
           <a:p>
             <a:r>
               <a:rPr sz="4200"/>
-              <a:t>20 years blaming mothers. Immense guilt. Children institutionalized.</a:t>
-            </a:r>
-          </a:p>
-          <a:p>
-            <a:r>
-              <a:rPr sz="4200"/>
-              <a:t>Bettelheim (main proponent) exposed as fraud who lied about credentials and abused patients.</a:t>
+              <a:t>THE OUTCOME: 50,000+ lobotomies in the US. ~5% mortality rate. Thousands permanently damaged. Rosemary Kennedy permanently incapacitated. Freeman was celebrated — until he was banned. The Soviet Union banned it in 1950 as "contrary to the principles of humanity."</a:t>
             </a:r>
           </a:p>
         </p:txBody>
@@ -970,37 +955,28 @@
           <a:p>
             <a:r>
               <a:rPr sz="4200"/>
-              <a:t>RECOVERED MEMORY THERAPY (1980s-1990s)</a:t>
-            </a:r>
-          </a:p>
+              <a:t>REFRIGERATOR MOTHER THEORY (1950s-1970s)</a:t>
+            </a:r>
+          </a:p>
+          <a:p/>
           <a:p>
             <a:r>
               <a:rPr sz="4200"/>
-              <a:t>The Belief: Repressed memories recoverable through therapy.</a:t>
-            </a:r>
-          </a:p>
+              <a:t>THE BELIEF: Autism is caused by cold, unloving mothers who fail to bond with their children. The mother's emotional deficiency causes the child to withdraw.</a:t>
+            </a:r>
+          </a:p>
+          <a:p/>
           <a:p>
             <a:r>
               <a:rPr sz="4200"/>
-              <a:t>The Evidence: Patients "remembered" under guidance.</a:t>
-            </a:r>
-          </a:p>
+              <a:t>THE EVIDENCE: Psychoanalytic interpretation. No empirical studies. No biological evidence. Bruno Bettelheim was the main proponent.</a:t>
+            </a:r>
+          </a:p>
+          <a:p/>
           <a:p>
             <a:r>
               <a:rPr sz="4200"/>
-              <a:t>Est. 1 million patients convinced they had repressed memories.</a:t>
-            </a:r>
-          </a:p>
-          <a:p>
-            <a:r>
-              <a:rPr sz="4200"/>
-              <a:t>"Tens of thousands of families" destroyed. People imprisoned on false accusations.</a:t>
-            </a:r>
-          </a:p>
-          <a:p>
-            <a:r>
-              <a:rPr sz="4200"/>
-              <a:t>Malpractice suits, license revocations. FBI found zero evidence of satanic abuse.</a:t>
+              <a:t>THE OUTCOME: 20 years blaming mothers for autism. Immense guilt inflicted on families. Children institutionalized rather than supported. Bettelheim was later exposed as a fraud who lied about his credentials and abused patients in his care.</a:t>
             </a:r>
           </a:p>
         </p:txBody>
@@ -1087,19 +1063,59 @@
           <a:p>
             <a:r>
               <a:rPr sz="4200"/>
-              <a:t>SATANIC PANIC / DAYCARE ABUSE + MPD/DID EPIDEMIC (1980s-1990s)</a:t>
+              <a:t>THE RECOVERED MEMORY CATASTROPHE (1980s-1990s)</a:t>
             </a:r>
           </a:p>
           <a:p>
             <a:r>
               <a:rPr sz="4200"/>
-              <a:t>Satanic Panic: 12,000+ cases alleged. McMartin: 7 years, $15M, zero convictions. FBI found no evidence.</a:t>
-            </a:r>
-          </a:p>
+              <a:t>One bad implicit model — repressed memory theory — simultaneously produced three interlocking disasters from a single flawed assumption.</a:t>
+            </a:r>
+          </a:p>
+          <a:p/>
           <a:p>
             <a:r>
               <a:rPr sz="4200"/>
-              <a:t>MPD/DID: 50,000 diagnoses by 1990s (vs. ~200 in all prior history). Patients got worse. Largely iatrogenic—created by the therapy. Epidemic disappeared when practices stopped.</a:t>
+              <a:t>THE BELIEF: Childhood trauma is routinely repressed, and recoverable through suggestive therapy (hypnosis, guided imagery, leading questions). Repressed abuse supposedly causes personality to "split" into alters. Recovered memories supplied the content — satanic cults ritually abusing children.</a:t>
+            </a:r>
+          </a:p>
+          <a:p/>
+          <a:p>
+            <a:r>
+              <a:rPr sz="4200"/>
+              <a:t>THE EVIDENCE: Patients "remembered" under therapeutic guidance. 95% of adult satanic ritual abuse allegations originated in therapy sessions. Psychiatrist Bennett Braun (1988) linked MPD to satanic cults at a national conference, lending professional credibility. No corroborating physical evidence for any of it. FBI Special Agent Kenneth Lanning's investigation: zero evidence.</a:t>
+            </a:r>
+          </a:p>
+          <a:p/>
+          <a:p>
+            <a:r>
+              <a:rPr sz="4200"/>
+              <a:t>THE OUTCOME:</a:t>
+            </a:r>
+          </a:p>
+          <a:p>
+            <a:r>
+              <a:rPr sz="4200"/>
+              <a:t>• Recovered Memory Therapy: Est. 1 million patients convinced they had repressed memories. "Tens of thousands of families" destroyed by false accusations. People imprisoned on fabricated testimony.</a:t>
+            </a:r>
+          </a:p>
+          <a:p>
+            <a:r>
+              <a:rPr sz="4200"/>
+              <a:t>• MPD/DID Epidemic: 50,000 diagnoses (vs. ~200 in all prior history). 25-50% of MPD patients also "recovered" satanic abuse memories. Patients got worse. Epidemic disappeared when practices stopped — iatrogenic.</a:t>
+            </a:r>
+          </a:p>
+          <a:p>
+            <a:r>
+              <a:rPr sz="4200"/>
+              <a:t>• Satanic Panic: 12,000+ cases alleged. McMartin trial: 7 years, $15M, zero convictions.</a:t>
+            </a:r>
+          </a:p>
+          <a:p/>
+          <a:p>
+            <a:r>
+              <a:rPr sz="4200"/>
+              <a:t>All three fell together. False Memory Syndrome Foundation (1992) countered recovered memory claims. Malpractice suits, license revocations. By 1995 the therapy, the diagnoses, and the panic had all receded.</a:t>
             </a:r>
           </a:p>
         </p:txBody>
@@ -1192,7 +1208,44 @@
           <a:p>
             <a:r>
               <a:rPr sz="4200"/>
-              <a:t>All cases share: No objective evidence, no way to test validity, emotion as the glue (fear, care, outrage), spread through professionals, ended in calamity.</a:t>
+              <a:t>All cases share:</a:t>
+            </a:r>
+          </a:p>
+          <a:p>
+            <a:r>
+              <a:rPr sz="4200"/>
+              <a:t>• No objective evidence</a:t>
+            </a:r>
+          </a:p>
+          <a:p>
+            <a:r>
+              <a:rPr sz="4200"/>
+              <a:t>• No way to test validity</a:t>
+            </a:r>
+          </a:p>
+          <a:p>
+            <a:r>
+              <a:rPr sz="4200"/>
+              <a:t>• Emotion as the glue (fear, care, outrage)</a:t>
+            </a:r>
+          </a:p>
+          <a:p>
+            <a:r>
+              <a:rPr sz="4200"/>
+              <a:t>• Spread through professionals</a:t>
+            </a:r>
+          </a:p>
+          <a:p>
+            <a:r>
+              <a:rPr sz="4200"/>
+              <a:t>• Ended in calamity (deaths, imprisonment, families destroyed)</a:t>
+            </a:r>
+          </a:p>
+          <a:p/>
+          <a:p>
+            <a:r>
+              <a:rPr sz="4200"/>
+              <a:t>The pattern repeats because the conditions repeat: caring professionals without objective frameworks get swept up in collective beliefs.</a:t>
             </a:r>
           </a:p>
         </p:txBody>
@@ -1288,24 +1341,28 @@
               <a:t>"I want to pause and invite you to wonder: What social contagions might be happening right now? What topics feel off-limits to question? What beliefs are held with such emotional intensity that questioning them makes you suspect?"</a:t>
             </a:r>
           </a:p>
+          <a:p/>
           <a:p>
             <a:r>
               <a:rPr sz="4200"/>
               <a:t>"I'm not going to name them. You can think of your own."</a:t>
             </a:r>
           </a:p>
+          <a:p/>
           <a:p>
             <a:r>
               <a:rPr sz="4200"/>
               <a:t>"But I want to be clear: I have deep respect for the power of these forces. They are not to be taken lightly. They are not an invitation to convenient rebellion."</a:t>
             </a:r>
           </a:p>
+          <a:p/>
           <a:p>
             <a:r>
               <a:rPr sz="4200"/>
               <a:t>"These forces are real. They serve a function—I believe a biological function. The question is not whether they exist, but whether we can recognize them and respond more thoughtfully than our ancestors did."</a:t>
             </a:r>
           </a:p>
+          <a:p/>
           <a:p>
             <a:r>
               <a:rPr sz="4200"/>
@@ -1396,13 +1453,14 @@
           <a:p>
             <a:r>
               <a:rPr sz="4200"/>
-              <a:t>SECTION IV: WHY THIS KEEPS HAPPENING (12 min)</a:t>
-            </a:r>
-          </a:p>
+              <a:t>SECTION V: WHY THIS KEEPS HAPPENING (12 min)</a:t>
+            </a:r>
+          </a:p>
+          <a:p/>
           <a:p>
             <a:r>
               <a:rPr sz="4200"/>
-              <a:t>This section covers the anxiety mechanism that drives these contagions.</a:t>
+              <a:t>This section introduces the anxiety model: Anxiety = Perceived Uncertainty + Urgency. This is the "A" in SARF. When anxious, people seek any explanation to reduce uncertainty. Untestable, oversimplified ideologies provide psychological relief — but at great expense.</a:t>
             </a:r>
           </a:p>
         </p:txBody>
@@ -1492,79 +1550,52 @@
               <a:t>ANXIETY = PERCEIVED UNCERTAINTY + URGENCY</a:t>
             </a:r>
           </a:p>
+          <a:p/>
           <a:p>
             <a:r>
               <a:rPr sz="4200"/>
               <a:t>Core concept (the "A" in SARF): Anxiety occurs when people perceive uncertainty combined with urgency.</a:t>
             </a:r>
           </a:p>
+          <a:p/>
           <a:p>
             <a:r>
               <a:rPr sz="4200"/>
-              <a:t>When anxious, the first thing people do is look for a way to reduce uncertainty. Any explanation feels better than no explanation.</a:t>
+              <a:t>Something in the environment — or in relationships — creates this perception. When anxious, the first thing people do is look for a way to reduce uncertainty. Any explanation feels better than no explanation.</a:t>
             </a:r>
           </a:p>
           <a:p/>
           <a:p>
             <a:r>
               <a:rPr sz="4200"/>
-              <a:t>THE IDEOLOGY PROVIDES RELIEF:</a:t>
-            </a:r>
-          </a:p>
+              <a:t>What all these contagions have in common: They offer an explanation that is (1) Untestable — can't prove it wrong, and (2) Simple — but oversimplified.</a:t>
+            </a:r>
+          </a:p>
+          <a:p/>
           <a:p>
             <a:r>
               <a:rPr sz="4200"/>
-              <a:t>What all contagions have in common—they offer an explanation that is:</a:t>
-            </a:r>
-          </a:p>
+              <a:t>This combination: "explains" the problem, cuts the uncertainty, people perceive uncertainty has gone away, they calm down. "The ideology provides psychological relief. The believers feel better. That's why it spreads."</a:t>
+            </a:r>
+          </a:p>
+          <a:p/>
           <a:p>
             <a:r>
               <a:rPr sz="4200"/>
-              <a:t>1. Untestable (unassailable—you can't prove it wrong)</a:t>
+              <a:t>Short-term: the ideology solves the suffering of anxiety for believers.</a:t>
             </a:r>
           </a:p>
           <a:p>
             <a:r>
               <a:rPr sz="4200"/>
-              <a:t>2. Simple (but oversimplified)</a:t>
-            </a:r>
-          </a:p>
+              <a:t>Long-term: it obscures the true problem — which is that these problems are not well understood.</a:t>
+            </a:r>
+          </a:p>
+          <a:p/>
           <a:p>
             <a:r>
               <a:rPr sz="4200"/>
-              <a:t>This cuts the uncertainty. People perceive uncertainty has gone away. They calm down.</a:t>
-            </a:r>
-          </a:p>
-          <a:p>
-            <a:r>
-              <a:rPr sz="4200"/>
-              <a:t>"The ideology provides psychological relief. The believers feel better. That's why it spreads."</a:t>
-            </a:r>
-          </a:p>
-          <a:p/>
-          <a:p>
-            <a:r>
-              <a:rPr sz="4200"/>
-              <a:t>Short-term: ideology solves the suffering of anxiety for believers.</a:t>
-            </a:r>
-          </a:p>
-          <a:p>
-            <a:r>
-              <a:rPr sz="4200"/>
-              <a:t>Long-term: it obscures the true problem—which is that these problems aren't well understood.</a:t>
-            </a:r>
-          </a:p>
-          <a:p>
-            <a:r>
-              <a:rPr sz="4200"/>
-              <a:t>The anxious response creates more damage than the original problem.</a:t>
-            </a:r>
-          </a:p>
-          <a:p/>
-          <a:p>
-            <a:r>
-              <a:rPr sz="4200"/>
-              <a:t>Band-aid analogy: One person applies a band-aid calmly. Another runs screaming, breaks furniture, spouse leaves the stove on, burns the house down.</a:t>
+              <a:t>The band-aid analogy: One person reacts to a cut knee by calmly applying a band-aid. Another runs into the house screaming bloody murder, breaking furniture, distressing their spouse who leaves the stove on rushing to the hospital, burning the house down.</a:t>
             </a:r>
           </a:p>
         </p:txBody>
@@ -1660,10 +1691,11 @@
               <a:t>506 boys, matched pairs, random assignment. Treatment: counseling, mentorship, summer camp, caring adults.</a:t>
             </a:r>
           </a:p>
+          <a:p/>
           <a:p>
             <a:r>
               <a:rPr sz="4200"/>
-              <a:t>30-year result: treatment group had more criminal offending, more alcohol abuse, more mental illness, lower job satisfaction, earlier death.</a:t>
+              <a:t>30-year result (Joan McCord follow-up): treatment group had more criminal offending, more alcohol abuse, more mental illness symptoms, lower occupational prestige, lower job satisfaction, more stress disorders, and earlier death.</a:t>
             </a:r>
           </a:p>
           <a:p/>
@@ -1673,12 +1705,6 @@
               <a:t>Joan McCord: "No one had ever discussed the possibility that intervention... that there is any potential for harmful effects."</a:t>
             </a:r>
           </a:p>
-          <a:p>
-            <a:r>
-              <a:rPr sz="4200"/>
-              <a:t>"Unless social programs are evaluated for potential harm as well as benefit, safety as well as efficacy, the choice of which social programs to use will remain a dangerous guess."</a:t>
-            </a:r>
-          </a:p>
           <a:p/>
           <a:p>
             <a:r>
@@ -1686,36 +1712,11 @@
               <a:t>Also: DARE (80% of schools, no effect), Scared Straight (kids did worse).</a:t>
             </a:r>
           </a:p>
+          <a:p/>
           <a:p>
             <a:r>
               <a:rPr sz="4200"/>
-              <a:t>Key line: "Caring isn't enough. Without measurement, caring can hurt."</a:t>
-            </a:r>
-          </a:p>
-          <a:p/>
-          <a:p>
-            <a:r>
-              <a:rPr sz="4200"/>
-              <a:t>WHY CARING PROFESSIONS ARE ESPECIALLY VULNERABLE:</a:t>
-            </a:r>
-          </a:p>
-          <a:p>
-            <a:r>
-              <a:rPr sz="4200"/>
-              <a:t>Caring professions attract people who want to help. Suffering creates urgency. Uncertainty about what works is intolerable. Any framework that promises clarity is appealing. Questioning the framework feels like abandoning the suffering.</a:t>
-            </a:r>
-          </a:p>
-          <a:p/>
-          <a:p>
-            <a:r>
-              <a:rPr sz="4200"/>
-              <a:t>WITHOUT MEASUREMENT, SOCIAL DYNAMICS RULE:</a:t>
-            </a:r>
-          </a:p>
-          <a:p>
-            <a:r>
-              <a:rPr sz="4200"/>
-              <a:t>Concepts spread based on who promotes them, how they feel, what's socially safe to say. Once belief sets in, questioning makes you a heretic. Traditional perspectives that emphasize autonomy/accountability become unmentionable.</a:t>
+              <a:t>"Caring isn't enough. Without measurement, caring can hurt."</a:t>
             </a:r>
           </a:p>
         </p:txBody>
@@ -1802,37 +1803,21 @@
           <a:p>
             <a:r>
               <a:rPr sz="4200"/>
-              <a:t>SECTION I: THE ENGINEER'S CONFESSION (3 min)</a:t>
-            </a:r>
-          </a:p>
+              <a:t>MATERIALS &amp; SOURCES ONLINE (1 min)</a:t>
+            </a:r>
+          </a:p>
+          <a:p/>
           <a:p>
             <a:r>
               <a:rPr sz="4200"/>
-              <a:t>Your story: engineer enters behavioral health field.</a:t>
-            </a:r>
-          </a:p>
+              <a:t>"All of the notes and sources for today's presentations are available online. If you want to follow along, review later, or share with colleagues, the link is right here."</a:t>
+            </a:r>
+          </a:p>
+          <a:p/>
           <a:p>
             <a:r>
               <a:rPr sz="4200"/>
-              <a:t>Expected: if it doesn't work, measure it, fix it, or discard it.</a:t>
-            </a:r>
-          </a:p>
-          <a:p>
-            <a:r>
-              <a:rPr sz="4200"/>
-              <a:t>Found: a field that doesn't work that way.</a:t>
-            </a:r>
-          </a:p>
-          <a:p>
-            <a:r>
-              <a:rPr sz="4200"/>
-              <a:t>"I'm not here to attack anyone's training. I'm here to make a case that everyone—not just engineers—needs scientific thinking."</a:t>
-            </a:r>
-          </a:p>
-          <a:p>
-            <a:r>
-              <a:rPr sz="4200"/>
-              <a:t>Transition: "Let me show you the data."</a:t>
+              <a:t>https://github.com/patrickkidd/ffrn-2026</a:t>
             </a:r>
           </a:p>
         </p:txBody>
@@ -1919,15 +1904,17 @@
           <a:p>
             <a:r>
               <a:rPr sz="4200"/>
-              <a:t>SECTION V: THE PROPOSAL (13 min)</a:t>
-            </a:r>
-          </a:p>
+              <a:t>SECTION VI: THE PROPOSAL (12 min)</a:t>
+            </a:r>
+          </a:p>
+          <a:p/>
           <a:p>
             <a:r>
               <a:rPr sz="4200"/>
-              <a:t>Scientific thinking is the antidote. The willingness to be falsified.</a:t>
-            </a:r>
-          </a:p>
+              <a:t>Scientific thinking is the antidote. Scientific thinking = "What would have to be true for me to be wrong?" The willingness to be falsified. Nobody in these historical cases asked: "What if we're making it worse?"</a:t>
+            </a:r>
+          </a:p>
+          <a:p/>
           <a:p>
             <a:r>
               <a:rPr sz="4200"/>
@@ -2027,12 +2014,14 @@
               <a:t>Studying a blade of grass to understand why it bends. Measuring angle, position, structure. Still can't predict movement.</a:t>
             </a:r>
           </a:p>
+          <a:p/>
           <a:p>
             <a:r>
               <a:rPr sz="4200"/>
               <a:t>Because the grass isn't the phenomenon. The wind is.</a:t>
             </a:r>
           </a:p>
+          <a:p/>
           <a:p>
             <a:r>
               <a:rPr sz="4200"/>
@@ -2135,7 +2124,13 @@
           <a:p>
             <a:r>
               <a:rPr sz="4200"/>
-              <a:t>Not society (too big, can't intervene). Not the individual (misses the pattern).</a:t>
+              <a:t>Not society (too big, can't intervene).</a:t>
+            </a:r>
+          </a:p>
+          <a:p>
+            <a:r>
+              <a:rPr sz="4200"/>
+              <a:t>Not the individual (misses the pattern).</a:t>
             </a:r>
           </a:p>
           <a:p>
@@ -2231,25 +2226,21 @@
               <a:t>FACTS CALM PEOPLE DOWN</a:t>
             </a:r>
           </a:p>
+          <a:p/>
           <a:p>
             <a:r>
               <a:rPr sz="4200"/>
-              <a:t>The Common Currency Argument: Everyone knows what a dollar is → global markets. Without common currency → barter → no coordination.</a:t>
-            </a:r>
-          </a:p>
+              <a:t>The Common Currency Argument: Everyone knows what a dollar is — global markets. Without common currency — barter — no coordination. Without measurable concepts — opinion vs. opinion — loudest voice wins.</a:t>
+            </a:r>
+          </a:p>
+          <a:p/>
           <a:p>
             <a:r>
               <a:rPr sz="4200"/>
-              <a:t>Without measurable concepts → opinion vs. opinion → loudest voice wins.</a:t>
+              <a:t>First move in family therapy: gather facts. A fact = something everyone can easily agree on. Facts establish a depolarized baseline. Without facts: tribal hierarchy — emotionally determined outcomes.</a:t>
             </a:r>
           </a:p>
           <a:p/>
-          <a:p>
-            <a:r>
-              <a:rPr sz="4200"/>
-              <a:t>First move in family therapy: gather facts. What is a fact? Something everyone can easily agree on. Facts establish a depolarized baseline.</a:t>
-            </a:r>
-          </a:p>
           <a:p>
             <a:r>
               <a:rPr sz="4200"/>
@@ -2352,25 +2343,25 @@
           <a:p>
             <a:r>
               <a:rPr sz="4200"/>
-              <a:t>- SARF: Measurable concepts for family-level patterns—including "A" for anxiety</a:t>
+              <a:t>• SARF: Measurable concepts for family-level patterns — including "A" for anxiety</a:t>
             </a:r>
           </a:p>
           <a:p>
             <a:r>
               <a:rPr sz="4200"/>
-              <a:t>- AI Tools: Technology to capture what we're learning to see</a:t>
+              <a:t>• AI Tools: Technology to capture what we're learning to see</a:t>
             </a:r>
           </a:p>
           <a:p>
             <a:r>
               <a:rPr sz="4200"/>
-              <a:t>- App Demo: Practical tools you can use Monday</a:t>
+              <a:t>• App Demo: Practical tools you can use Monday</a:t>
             </a:r>
           </a:p>
           <a:p>
             <a:r>
               <a:rPr sz="4200"/>
-              <a:t>- Clinical Case: Evidence it works</a:t>
+              <a:t>• Clinical Case: Evidence it works</a:t>
             </a:r>
           </a:p>
         </p:txBody>
@@ -2460,47 +2451,25 @@
               <a:t>CLOSING / CALL TO ACTION</a:t>
             </a:r>
           </a:p>
+          <a:p/>
           <a:p>
             <a:r>
               <a:rPr sz="4200"/>
               <a:t>"Everyone needs scientific thinking."</a:t>
             </a:r>
           </a:p>
+          <a:p/>
           <a:p>
             <a:r>
               <a:rPr sz="4200"/>
               <a:t>"Before your next intake, draw the family."</a:t>
             </a:r>
           </a:p>
+          <a:p/>
           <a:p>
             <a:r>
               <a:rPr sz="4200"/>
-              <a:t>"Before your next intervention, ask: how would I know if this is making things worse?"</a:t>
-            </a:r>
-          </a:p>
-          <a:p/>
-          <a:p>
-            <a:r>
-              <a:rPr sz="4200"/>
-              <a:t>Q&amp;A follows (10 min). Likely questions:</a:t>
-            </a:r>
-          </a:p>
-          <a:p>
-            <a:r>
-              <a:rPr sz="4200"/>
-              <a:t>- "Are you saying therapy doesn't work?"</a:t>
-            </a:r>
-          </a:p>
-          <a:p>
-            <a:r>
-              <a:rPr sz="4200"/>
-              <a:t>- "What about individual factors like genetics?"</a:t>
-            </a:r>
-          </a:p>
-          <a:p>
-            <a:r>
-              <a:rPr sz="4200"/>
-              <a:t>- "How do I apply scientific thinking without being a researcher?"</a:t>
+              <a:t>"Before your next intervention, ask: How would I know if this is making things worse?"</a:t>
             </a:r>
           </a:p>
         </p:txBody>
@@ -2587,19 +2556,40 @@
           <a:p>
             <a:r>
               <a:rPr sz="4200"/>
-              <a:t>SECTION II: THE FIELD IS BROKEN (8 min)</a:t>
-            </a:r>
-          </a:p>
+              <a:t>SECTION II: THE ENGINEER'S CONFESSION (3 min)</a:t>
+            </a:r>
+          </a:p>
+          <a:p/>
           <a:p>
             <a:r>
               <a:rPr sz="4200"/>
-              <a:t>This section presents the data showing the field is broken.</a:t>
+              <a:t>Your story: engineer enters behavioral health field.</a:t>
             </a:r>
           </a:p>
           <a:p>
             <a:r>
               <a:rPr sz="4200"/>
-              <a:t>Scope note: "I'll be speaking in the context of clinical psychology since it's a formalized domain with the most concrete examples. But these patterns apply across all helping professions—LCSW, LPC, MFT, and others."</a:t>
+              <a:t>Expected: if it doesn't work, measure it, fix it, or discard it.</a:t>
+            </a:r>
+          </a:p>
+          <a:p>
+            <a:r>
+              <a:rPr sz="4200"/>
+              <a:t>Found: a field that doesn't work that way.</a:t>
+            </a:r>
+          </a:p>
+          <a:p/>
+          <a:p>
+            <a:r>
+              <a:rPr sz="4200"/>
+              <a:t>"I'm not here to attack anyone's training. I'm here to make a case that everyone—not just engineers—needs scientific thinking."</a:t>
+            </a:r>
+          </a:p>
+          <a:p/>
+          <a:p>
+            <a:r>
+              <a:rPr sz="4200"/>
+              <a:t>Transition: "Let me show you the data."</a:t>
             </a:r>
           </a:p>
         </p:txBody>
@@ -2686,37 +2676,14 @@
           <a:p>
             <a:r>
               <a:rPr sz="4200"/>
-              <a:t>THE TREATMENT-PREVALENCE PARADOX (Centerpiece)</a:t>
-            </a:r>
-          </a:p>
+              <a:t>SECTION III: THE FIELD IS BROKEN (8 min)</a:t>
+            </a:r>
+          </a:p>
+          <a:p/>
           <a:p>
             <a:r>
               <a:rPr sz="4200"/>
-              <a:t>Source: Ormel et al. (2022)</a:t>
-            </a:r>
-          </a:p>
-          <a:p>
-            <a:r>
-              <a:rPr sz="4200"/>
-              <a:t>Treatment for depression increased 4x from 1987-2007.</a:t>
-            </a:r>
-          </a:p>
-          <a:p>
-            <a:r>
-              <a:rPr sz="4200"/>
-              <a:t>Prevalence of depression: stayed the same or increased.</a:t>
-            </a:r>
-          </a:p>
-          <a:p>
-            <a:r>
-              <a:rPr sz="4200"/>
-              <a:t>Researchers' conclusion: "Significant prevalence reduction requires not only better treatment but foremost long-term structurally funded prevention targeting powerful determinants."</a:t>
-            </a:r>
-          </a:p>
-          <a:p>
-            <a:r>
-              <a:rPr sz="4200"/>
-              <a:t>Key line: "More treatment does not mean less depression."</a:t>
+              <a:t>This section presents the hard data showing the field isn't working as expected. Treatment is increasing but outcomes aren't improving. The research base itself is unreliable.</a:t>
             </a:r>
           </a:p>
         </p:txBody>
@@ -2803,31 +2770,40 @@
           <a:p>
             <a:r>
               <a:rPr sz="4200"/>
-              <a:t>THE RELAPSE PROBLEM</a:t>
+              <a:t>THE TREATMENT-PREVALENCE PARADOX (Centerpiece)</a:t>
             </a:r>
           </a:p>
           <a:p>
             <a:r>
               <a:rPr sz="4200"/>
-              <a:t>Sources: BMC Psychiatry, BJGP</a:t>
-            </a:r>
-          </a:p>
+              <a:t>Source: Ormel et al. (2022)</a:t>
+            </a:r>
+          </a:p>
+          <a:p/>
           <a:p>
             <a:r>
               <a:rPr sz="4200"/>
-              <a:t>After first episode: 50% relapse. After second: 70%. After third: 90%.</a:t>
+              <a:t>Treatment for depression increased 4x from 1987-2007.</a:t>
             </a:r>
           </a:p>
           <a:p>
             <a:r>
               <a:rPr sz="4200"/>
-              <a:t>85% recurrence within a decade. 79% of relapses within first 6 months.</a:t>
-            </a:r>
-          </a:p>
+              <a:t>Prevalence of depression: stayed the same or increased.</a:t>
+            </a:r>
+          </a:p>
+          <a:p/>
           <a:p>
             <a:r>
               <a:rPr sz="4200"/>
-              <a:t>Key line: "The fire keeps getting relit."</a:t>
+              <a:t>Researchers' conclusion: "Significant prevalence reduction requires not only better treatment but foremost long-term structurally funded prevention targeting powerful determinants."</a:t>
+            </a:r>
+          </a:p>
+          <a:p/>
+          <a:p>
+            <a:r>
+              <a:rPr sz="4200"/>
+              <a:t>"More treatment does not mean less depression."</a:t>
             </a:r>
           </a:p>
         </p:txBody>
@@ -2914,43 +2890,45 @@
           <a:p>
             <a:r>
               <a:rPr sz="4200"/>
-              <a:t>THE YOUTH CRISIS</a:t>
+              <a:t>THE RELAPSE PROBLEM</a:t>
             </a:r>
           </a:p>
           <a:p>
             <a:r>
               <a:rPr sz="4200"/>
-              <a:t>Sources: CDC MMWR 2023, JED Foundation</a:t>
-            </a:r>
-          </a:p>
+              <a:t>Sources: BMC Psychiatry, BJGP</a:t>
+            </a:r>
+          </a:p>
+          <a:p/>
           <a:p>
             <a:r>
               <a:rPr sz="4200"/>
-              <a:t>Teen depression: 145% increase (2010-2021).</a:t>
+              <a:t>After first episode: 50% relapse.</a:t>
             </a:r>
           </a:p>
           <a:p>
             <a:r>
               <a:rPr sz="4200"/>
-              <a:t>Suicide deaths ages 10-24: 62% increase (2007-2021).</a:t>
+              <a:t>After second: 70%. After third: 90%.</a:t>
             </a:r>
           </a:p>
           <a:p>
             <a:r>
               <a:rPr sz="4200"/>
-              <a:t>1 in 5 high school students seriously considered suicide in 2023.</a:t>
+              <a:t>85% recurrence within a decade.</a:t>
             </a:r>
           </a:p>
           <a:p>
             <a:r>
               <a:rPr sz="4200"/>
-              <a:t>Preteen suicide (ages 8+): 8.2% annual increase (2008-2022).</a:t>
-            </a:r>
-          </a:p>
+              <a:t>79% of relapses occur within first 6 months.</a:t>
+            </a:r>
+          </a:p>
+          <a:p/>
           <a:p>
             <a:r>
               <a:rPr sz="4200"/>
-              <a:t>More therapists, more spending, more awareness than ever.</a:t>
+              <a:t>"The fire keeps getting relit."</a:t>
             </a:r>
           </a:p>
         </p:txBody>
@@ -3037,37 +3015,45 @@
           <a:p>
             <a:r>
               <a:rPr sz="4200"/>
-              <a:t>THE REPLICATION CRISIS + INSTITUTIONAL LOSS OF CONFIDENCE</a:t>
+              <a:t>THE YOUTH CRISIS</a:t>
             </a:r>
           </a:p>
           <a:p>
             <a:r>
               <a:rPr sz="4200"/>
-              <a:t>Source: Northwestern IPR</a:t>
-            </a:r>
-          </a:p>
+              <a:t>Sources: CDC MMWR 2023, JED Foundation</a:t>
+            </a:r>
+          </a:p>
+          <a:p/>
           <a:p>
             <a:r>
               <a:rPr sz="4200"/>
-              <a:t>~40% of psychology studies replicate. "The research base itself is unreliable."</a:t>
+              <a:t>Teen depression: 145% increase (2010-2021).</a:t>
             </a:r>
           </a:p>
           <a:p>
             <a:r>
               <a:rPr sz="4200"/>
-              <a:t>NIMH stopped funding DSM-only research (2013).</a:t>
+              <a:t>Suicide deaths ages 10-24: 62% increase (2007-2021).</a:t>
             </a:r>
           </a:p>
           <a:p>
             <a:r>
               <a:rPr sz="4200"/>
-              <a:t>Thomas Insel: DSM diagnoses are "consensus about clusters of clinical symptoms, not any objective laboratory measure."</a:t>
+              <a:t>1 in 5 high school students seriously considered suicide in 2023.</a:t>
             </a:r>
           </a:p>
           <a:p>
             <a:r>
               <a:rPr sz="4200"/>
-              <a:t>"The field's own institutions have lost confidence in its diagnostic framework."</a:t>
+              <a:t>Preteen suicide (ages 8+): 8.2% annual increase (2008-2022).</a:t>
+            </a:r>
+          </a:p>
+          <a:p/>
+          <a:p>
+            <a:r>
+              <a:rPr sz="4200"/>
+              <a:t>More therapists, more spending, more awareness than ever.</a:t>
             </a:r>
           </a:p>
         </p:txBody>
@@ -3154,43 +3140,40 @@
           <a:p>
             <a:r>
               <a:rPr sz="4200"/>
-              <a:t>PUBLIC SKEPTICISM</a:t>
+              <a:t>THE REPLICATION CRISIS + INSTITUTIONAL LOSS OF CONFIDENCE</a:t>
             </a:r>
           </a:p>
           <a:p>
             <a:r>
               <a:rPr sz="4200"/>
-              <a:t>Source: Roper Center / Psychology Today polls</a:t>
-            </a:r>
-          </a:p>
+              <a:t>Source: Northwestern IPR</a:t>
+            </a:r>
+          </a:p>
+          <a:p/>
           <a:p>
             <a:r>
               <a:rPr sz="4200"/>
-              <a:t>43% say costs of therapy outweigh benefits (2004).</a:t>
-            </a:r>
-          </a:p>
+              <a:t>~40% of psychology studies replicate. The research base itself is unreliable.</a:t>
+            </a:r>
+          </a:p>
+          <a:p/>
           <a:p>
             <a:r>
               <a:rPr sz="4200"/>
-              <a:t>38% believe most therapists need therapy themselves (2004).</a:t>
+              <a:t>NIMH stopped funding DSM-only research (2013).</a:t>
             </a:r>
           </a:p>
           <a:p>
             <a:r>
               <a:rPr sz="4200"/>
-              <a:t>Public perceives therapy effective in only 26-50% of cases.</a:t>
-            </a:r>
-          </a:p>
+              <a:t>Thomas Insel: DSM diagnoses are "consensus about clusters of clinical symptoms, not any objective laboratory measure."</a:t>
+            </a:r>
+          </a:p>
+          <a:p/>
           <a:p>
             <a:r>
               <a:rPr sz="4200"/>
-              <a:t>"The public senses something is wrong—even if they can't articulate it. This skepticism has a basis."</a:t>
-            </a:r>
-          </a:p>
-          <a:p>
-            <a:r>
-              <a:rPr sz="4200"/>
-              <a:t>Transition: "How does a field stay broken this long? Let me show you a pattern."</a:t>
+              <a:t>The field's own institutions have lost confidence in its diagnostic framework.</a:t>
             </a:r>
           </a:p>
         </p:txBody>
@@ -3277,13 +3260,52 @@
           <a:p>
             <a:r>
               <a:rPr sz="4200"/>
-              <a:t>SECTION III: HISTORICAL CATASTROPHES (14 min)</a:t>
+              <a:t>PUBLIC SKEPTICISM</a:t>
             </a:r>
           </a:p>
           <a:p>
             <a:r>
               <a:rPr sz="4200"/>
-              <a:t>Setup: These aren't ancient history. These are cases where caring professionals, lacking objective frameworks, got swept up in collective beliefs that destroyed lives. The pattern repeats because the conditions repeat.</a:t>
+              <a:t>Source: Roper Center / Psychology Today polls</a:t>
+            </a:r>
+          </a:p>
+          <a:p/>
+          <a:p>
+            <a:r>
+              <a:rPr sz="4200"/>
+              <a:t>43% say costs of therapy outweigh benefits (2004).</a:t>
+            </a:r>
+          </a:p>
+          <a:p>
+            <a:r>
+              <a:rPr sz="4200"/>
+              <a:t>38% believe most therapists need therapy themselves (2004).</a:t>
+            </a:r>
+          </a:p>
+          <a:p>
+            <a:r>
+              <a:rPr sz="4200"/>
+              <a:t>Public perceives therapy effective in only 26-50% of cases.</a:t>
+            </a:r>
+          </a:p>
+          <a:p>
+            <a:r>
+              <a:rPr sz="4200"/>
+              <a:t>Psychiatrists rated lower than doctors, nurses, pharmacists, even dentists for honesty/ethics (2012).</a:t>
+            </a:r>
+          </a:p>
+          <a:p/>
+          <a:p>
+            <a:r>
+              <a:rPr sz="4200"/>
+              <a:t>"The public senses something is wrong—even if they can't articulate it. This skepticism has a basis."</a:t>
+            </a:r>
+          </a:p>
+          <a:p/>
+          <a:p>
+            <a:r>
+              <a:rPr sz="4200"/>
+              <a:t>Transition: "How does a field stay broken this long? Let me show you a pattern."</a:t>
             </a:r>
           </a:p>
         </p:txBody>
@@ -3904,7 +3926,7 @@
     <p:bg>
       <p:bgPr>
         <a:solidFill>
-          <a:srgbClr val="0F1B2D"/>
+          <a:srgbClr val="0E7490"/>
         </a:solidFill>
       </p:bgPr>
     </p:bg>
@@ -3930,24 +3952,24 @@
         </p:nvSpPr>
         <p:spPr>
           <a:xfrm>
-            <a:off x="731520" y="365760"/>
-            <a:ext cx="7680960" cy="640080"/>
-          </a:xfrm>
-          <a:prstGeom prst="rect">
-            <a:avLst/>
-          </a:prstGeom>
-          <a:noFill/>
-          <a:ln/>
-        </p:spPr>
-        <p:txBody>
-          <a:bodyPr wrap="square" lIns="0" tIns="0" rIns="0" bIns="0" rtlCol="0" anchor="ctr"/>
-          <a:lstStyle/>
-          <a:p>
-            <a:pPr indent="0" marL="0">
-              <a:buNone/>
-            </a:pPr>
-            <a:r>
-              <a:rPr lang="en-US" sz="2800" b="1" dirty="0">
+            <a:off x="731520" y="1097280"/>
+            <a:ext cx="1097280" cy="1097280"/>
+          </a:xfrm>
+          <a:prstGeom prst="rect">
+            <a:avLst/>
+          </a:prstGeom>
+          <a:noFill/>
+          <a:ln/>
+        </p:spPr>
+        <p:txBody>
+          <a:bodyPr wrap="square" lIns="0" tIns="0" rIns="0" bIns="0" rtlCol="0" anchor="ctr"/>
+          <a:lstStyle/>
+          <a:p>
+            <a:pPr algn="ctr" indent="0" marL="0">
+              <a:buNone/>
+            </a:pPr>
+            <a:r>
+              <a:rPr lang="en-US" sz="4800" b="1" dirty="0">
                 <a:solidFill>
                   <a:srgbClr val="FFFFFF"/>
                 </a:solidFill>
@@ -3955,9 +3977,9 @@
                 <a:ea typeface="Georgia" pitchFamily="34" charset="-122"/>
                 <a:cs typeface="Georgia" pitchFamily="34" charset="-120"/>
               </a:rPr>
-              <a:t>Salem Witch Trials (1692)</a:t>
-            </a:r>
-            <a:endParaRPr lang="en-US" sz="2800" dirty="0"/>
+              <a:t>IV</a:t>
+            </a:r>
+            <a:endParaRPr lang="en-US" sz="4800" dirty="0"/>
           </a:p>
         </p:txBody>
       </p:sp>
@@ -3969,14 +3991,14 @@
         </p:nvSpPr>
         <p:spPr>
           <a:xfrm>
-            <a:off x="731520" y="1280160"/>
-            <a:ext cx="3657600" cy="1463040"/>
+            <a:off x="2011680" y="1371600"/>
+            <a:ext cx="36576" cy="640080"/>
           </a:xfrm>
           <a:prstGeom prst="rect">
             <a:avLst/>
           </a:prstGeom>
           <a:solidFill>
-            <a:srgbClr val="1B2A4A"/>
+            <a:srgbClr val="22D3EE"/>
           </a:solidFill>
           <a:ln/>
         </p:spPr>
@@ -3989,183 +4011,69 @@
         </p:nvSpPr>
         <p:spPr>
           <a:xfrm>
-            <a:off x="731520" y="1325880"/>
-            <a:ext cx="3657600" cy="822960"/>
-          </a:xfrm>
-          <a:prstGeom prst="rect">
-            <a:avLst/>
-          </a:prstGeom>
-          <a:noFill/>
-          <a:ln/>
-        </p:spPr>
-        <p:txBody>
-          <a:bodyPr wrap="square" lIns="0" tIns="0" rIns="0" bIns="0" rtlCol="0" anchor="ctr"/>
-          <a:lstStyle/>
-          <a:p>
-            <a:pPr algn="ctr" indent="0" marL="0">
-              <a:buNone/>
-            </a:pPr>
-            <a:r>
-              <a:rPr lang="en-US" sz="5600" b="1" dirty="0">
-                <a:solidFill>
-                  <a:srgbClr val="D97706"/>
+            <a:off x="2286000" y="1005840"/>
+            <a:ext cx="5486400" cy="1188720"/>
+          </a:xfrm>
+          <a:prstGeom prst="rect">
+            <a:avLst/>
+          </a:prstGeom>
+          <a:noFill/>
+          <a:ln/>
+        </p:spPr>
+        <p:txBody>
+          <a:bodyPr wrap="square" lIns="0" tIns="0" rIns="0" bIns="0" rtlCol="0" anchor="ctr"/>
+          <a:lstStyle/>
+          <a:p>
+            <a:pPr indent="0" marL="0">
+              <a:lnSpc>
+                <a:spcPct val="110000"/>
+              </a:lnSpc>
+              <a:buNone/>
+            </a:pPr>
+            <a:r>
+              <a:rPr lang="en-US" sz="3600" b="1" dirty="0">
+                <a:solidFill>
+                  <a:srgbClr val="FFFFFF"/>
                 </a:solidFill>
                 <a:latin typeface="Georgia" pitchFamily="34" charset="0"/>
                 <a:ea typeface="Georgia" pitchFamily="34" charset="-122"/>
                 <a:cs typeface="Georgia" pitchFamily="34" charset="-120"/>
               </a:rPr>
-              <a:t>25+</a:t>
-            </a:r>
-            <a:endParaRPr lang="en-US" sz="5600" dirty="0"/>
-          </a:p>
-        </p:txBody>
-      </p:sp>
-      <p:sp>
-        <p:nvSpPr>
-          <p:cNvPr id="5" name="Text 3"/>
-          <p:cNvSpPr/>
-          <p:nvPr/>
-        </p:nvSpPr>
-        <p:spPr>
-          <a:xfrm>
-            <a:off x="731520" y="2148840"/>
-            <a:ext cx="3657600" cy="365760"/>
-          </a:xfrm>
-          <a:prstGeom prst="rect">
-            <a:avLst/>
-          </a:prstGeom>
-          <a:noFill/>
-          <a:ln/>
-        </p:spPr>
-        <p:txBody>
-          <a:bodyPr wrap="square" lIns="0" tIns="0" rIns="0" bIns="0" rtlCol="0" anchor="ctr"/>
-          <a:lstStyle/>
-          <a:p>
-            <a:pPr algn="ctr" indent="0" marL="0">
-              <a:buNone/>
-            </a:pPr>
-            <a:r>
-              <a:rPr lang="en-US" sz="1600" dirty="0">
-                <a:solidFill>
-                  <a:srgbClr val="94A3B8"/>
-                </a:solidFill>
-                <a:latin typeface="Calibri" pitchFamily="34" charset="0"/>
-                <a:ea typeface="Calibri" pitchFamily="34" charset="-122"/>
-                <a:cs typeface="Calibri" pitchFamily="34" charset="-120"/>
-              </a:rPr>
-              <a:t>dead</a:t>
-            </a:r>
-            <a:endParaRPr lang="en-US" sz="1600" dirty="0"/>
-          </a:p>
-        </p:txBody>
-      </p:sp>
-      <p:sp>
-        <p:nvSpPr>
-          <p:cNvPr id="6" name="Shape 4"/>
-          <p:cNvSpPr/>
-          <p:nvPr/>
-        </p:nvSpPr>
-        <p:spPr>
-          <a:xfrm>
-            <a:off x="4754880" y="1280160"/>
-            <a:ext cx="3657600" cy="1463040"/>
-          </a:xfrm>
-          <a:prstGeom prst="rect">
-            <a:avLst/>
-          </a:prstGeom>
-          <a:solidFill>
-            <a:srgbClr val="1B2A4A"/>
-          </a:solidFill>
-          <a:ln/>
-        </p:spPr>
-      </p:sp>
-      <p:sp>
-        <p:nvSpPr>
-          <p:cNvPr id="7" name="Text 5"/>
-          <p:cNvSpPr/>
-          <p:nvPr/>
-        </p:nvSpPr>
-        <p:spPr>
-          <a:xfrm>
-            <a:off x="4754880" y="1325880"/>
-            <a:ext cx="3657600" cy="822960"/>
-          </a:xfrm>
-          <a:prstGeom prst="rect">
-            <a:avLst/>
-          </a:prstGeom>
-          <a:noFill/>
-          <a:ln/>
-        </p:spPr>
-        <p:txBody>
-          <a:bodyPr wrap="square" lIns="0" tIns="0" rIns="0" bIns="0" rtlCol="0" anchor="ctr"/>
-          <a:lstStyle/>
-          <a:p>
-            <a:pPr algn="ctr" indent="0" marL="0">
-              <a:buNone/>
-            </a:pPr>
-            <a:r>
-              <a:rPr lang="en-US" sz="5600" b="1" dirty="0">
-                <a:solidFill>
-                  <a:srgbClr val="D97706"/>
+              <a:t>Historical</a:t>
+            </a:r>
+            <a:endParaRPr lang="en-US" sz="3600" dirty="0"/>
+          </a:p>
+          <a:p>
+            <a:pPr indent="0" marL="0">
+              <a:lnSpc>
+                <a:spcPct val="110000"/>
+              </a:lnSpc>
+              <a:buNone/>
+            </a:pPr>
+            <a:r>
+              <a:rPr lang="en-US" sz="3600" b="1" dirty="0">
+                <a:solidFill>
+                  <a:srgbClr val="FFFFFF"/>
                 </a:solidFill>
                 <a:latin typeface="Georgia" pitchFamily="34" charset="0"/>
                 <a:ea typeface="Georgia" pitchFamily="34" charset="-122"/>
                 <a:cs typeface="Georgia" pitchFamily="34" charset="-120"/>
               </a:rPr>
-              <a:t>200+</a:t>
-            </a:r>
-            <a:endParaRPr lang="en-US" sz="5600" dirty="0"/>
-          </a:p>
-        </p:txBody>
-      </p:sp>
-      <p:sp>
-        <p:nvSpPr>
-          <p:cNvPr id="8" name="Text 6"/>
-          <p:cNvSpPr/>
-          <p:nvPr/>
-        </p:nvSpPr>
-        <p:spPr>
-          <a:xfrm>
-            <a:off x="4754880" y="2148840"/>
-            <a:ext cx="3657600" cy="365760"/>
-          </a:xfrm>
-          <a:prstGeom prst="rect">
-            <a:avLst/>
-          </a:prstGeom>
-          <a:noFill/>
-          <a:ln/>
-        </p:spPr>
-        <p:txBody>
-          <a:bodyPr wrap="square" lIns="0" tIns="0" rIns="0" bIns="0" rtlCol="0" anchor="ctr"/>
-          <a:lstStyle/>
-          <a:p>
-            <a:pPr algn="ctr" indent="0" marL="0">
-              <a:buNone/>
-            </a:pPr>
-            <a:r>
-              <a:rPr lang="en-US" sz="1600" dirty="0">
-                <a:solidFill>
-                  <a:srgbClr val="94A3B8"/>
-                </a:solidFill>
-                <a:latin typeface="Calibri" pitchFamily="34" charset="0"/>
-                <a:ea typeface="Calibri" pitchFamily="34" charset="-122"/>
-                <a:cs typeface="Calibri" pitchFamily="34" charset="-120"/>
-              </a:rPr>
-              <a:t>accused</a:t>
-            </a:r>
-            <a:endParaRPr lang="en-US" sz="1600" dirty="0"/>
-          </a:p>
-        </p:txBody>
-      </p:sp>
-      <p:sp>
-        <p:nvSpPr>
-          <p:cNvPr id="9" name="Text 7"/>
-          <p:cNvSpPr/>
-          <p:nvPr/>
-        </p:nvSpPr>
-        <p:spPr>
-          <a:xfrm>
-            <a:off x="731520" y="3200400"/>
+              <a:t>Catastrophes</a:t>
+            </a:r>
+            <a:endParaRPr lang="en-US" sz="3600" dirty="0"/>
+          </a:p>
+        </p:txBody>
+      </p:sp>
+      <p:sp>
+        <p:nvSpPr>
+          <p:cNvPr id="5" name="Text 3"/>
+          <p:cNvSpPr/>
+          <p:nvPr/>
+        </p:nvSpPr>
+        <p:spPr>
+          <a:xfrm>
+            <a:off x="731520" y="3108960"/>
             <a:ext cx="7680960" cy="731520"/>
           </a:xfrm>
           <a:prstGeom prst="rect">
@@ -4185,17 +4093,17 @@
               <a:buNone/>
             </a:pPr>
             <a:r>
-              <a:rPr lang="en-US" sz="1500" dirty="0">
-                <a:solidFill>
-                  <a:srgbClr val="94A3B8"/>
+              <a:rPr lang="en-US" sz="1400" i="1" dirty="0">
+                <a:solidFill>
+                  <a:srgbClr val="22D3EE"/>
                 </a:solidFill>
                 <a:latin typeface="Calibri" pitchFamily="34" charset="0"/>
                 <a:ea typeface="Calibri" pitchFamily="34" charset="-122"/>
                 <a:cs typeface="Calibri" pitchFamily="34" charset="-120"/>
               </a:rPr>
-              <a:t>Evidence: spectral visions, fits, accusations.</a:t>
-            </a:r>
-            <a:endParaRPr lang="en-US" sz="1500" dirty="0"/>
+              <a:t>These aren't ancient history. These are cases where caring professionals,</a:t>
+            </a:r>
+            <a:endParaRPr lang="en-US" sz="1400" dirty="0"/>
           </a:p>
           <a:p>
             <a:pPr indent="0" marL="0">
@@ -4205,17 +4113,56 @@
               <a:buNone/>
             </a:pPr>
             <a:r>
-              <a:rPr lang="en-US" sz="1500" dirty="0">
-                <a:solidFill>
-                  <a:srgbClr val="94A3B8"/>
+              <a:rPr lang="en-US" sz="1400" i="1" dirty="0">
+                <a:solidFill>
+                  <a:srgbClr val="22D3EE"/>
                 </a:solidFill>
                 <a:latin typeface="Calibri" pitchFamily="34" charset="0"/>
                 <a:ea typeface="Calibri" pitchFamily="34" charset="-122"/>
                 <a:cs typeface="Calibri" pitchFamily="34" charset="-120"/>
               </a:rPr>
-              <a:t>Within years, jurors signed public apologies.</a:t>
-            </a:r>
-            <a:endParaRPr lang="en-US" sz="1500" dirty="0"/>
+              <a:t>lacking objective frameworks, got swept up in collective beliefs that destroyed lives.</a:t>
+            </a:r>
+            <a:endParaRPr lang="en-US" sz="1400" dirty="0"/>
+          </a:p>
+        </p:txBody>
+      </p:sp>
+      <p:sp>
+        <p:nvSpPr>
+          <p:cNvPr id="6" name="Text 4"/>
+          <p:cNvSpPr/>
+          <p:nvPr/>
+        </p:nvSpPr>
+        <p:spPr>
+          <a:xfrm>
+            <a:off x="731520" y="4389120"/>
+            <a:ext cx="2743200" cy="365760"/>
+          </a:xfrm>
+          <a:prstGeom prst="rect">
+            <a:avLst/>
+          </a:prstGeom>
+          <a:noFill/>
+          <a:ln/>
+        </p:spPr>
+        <p:txBody>
+          <a:bodyPr wrap="square" lIns="0" tIns="0" rIns="0" bIns="0" rtlCol="0" anchor="ctr"/>
+          <a:lstStyle/>
+          <a:p>
+            <a:pPr indent="0" marL="0">
+              <a:buNone/>
+            </a:pPr>
+            <a:r>
+              <a:rPr lang="en-US" sz="1300" i="1" dirty="0">
+                <a:solidFill>
+                  <a:srgbClr val="22D3EE"/>
+                </a:solidFill>
+                <a:latin typeface="Calibri" pitchFamily="34" charset="0"/>
+                <a:ea typeface="Calibri" pitchFamily="34" charset="-122"/>
+                <a:cs typeface="Calibri" pitchFamily="34" charset="-120"/>
+              </a:rPr>
+              <a:t>14 minutes</a:t>
+            </a:r>
+            <a:endParaRPr lang="en-US" sz="1300" dirty="0"/>
           </a:p>
         </p:txBody>
       </p:sp>
@@ -4284,7 +4231,7 @@
                 <a:ea typeface="Georgia" pitchFamily="34" charset="-122"/>
                 <a:cs typeface="Georgia" pitchFamily="34" charset="-120"/>
               </a:rPr>
-              <a:t>Lobotomy Epidemic (1940s–1950s)</a:t>
+              <a:t>Salem Witch Trials (1692)</a:t>
             </a:r>
             <a:endParaRPr lang="en-US" sz="2800" dirty="0"/>
           </a:p>
@@ -4298,8 +4245,8 @@
         </p:nvSpPr>
         <p:spPr>
           <a:xfrm>
-            <a:off x="731520" y="1188720"/>
-            <a:ext cx="7680960" cy="1280160"/>
+            <a:off x="731520" y="1280160"/>
+            <a:ext cx="3657600" cy="1463040"/>
           </a:xfrm>
           <a:prstGeom prst="rect">
             <a:avLst/>
@@ -4318,8 +4265,8 @@
         </p:nvSpPr>
         <p:spPr>
           <a:xfrm>
-            <a:off x="731520" y="1188720"/>
-            <a:ext cx="7680960" cy="731520"/>
+            <a:off x="731520" y="1325880"/>
+            <a:ext cx="3657600" cy="822960"/>
           </a:xfrm>
           <a:prstGeom prst="rect">
             <a:avLst/>
@@ -4343,7 +4290,7 @@
                 <a:ea typeface="Georgia" pitchFamily="34" charset="-122"/>
                 <a:cs typeface="Georgia" pitchFamily="34" charset="-120"/>
               </a:rPr>
-              <a:t>50,000+</a:t>
+              <a:t>25+</a:t>
             </a:r>
             <a:endParaRPr lang="en-US" sz="5600" dirty="0"/>
           </a:p>
@@ -4357,8 +4304,8 @@
         </p:nvSpPr>
         <p:spPr>
           <a:xfrm>
-            <a:off x="731520" y="1920240"/>
-            <a:ext cx="7680960" cy="365760"/>
+            <a:off x="731520" y="2148840"/>
+            <a:ext cx="3657600" cy="365760"/>
           </a:xfrm>
           <a:prstGeom prst="rect">
             <a:avLst/>
@@ -4382,7 +4329,7 @@
                 <a:ea typeface="Calibri" pitchFamily="34" charset="-122"/>
                 <a:cs typeface="Calibri" pitchFamily="34" charset="-120"/>
               </a:rPr>
-              <a:t>lobotomies in the United States</a:t>
+              <a:t>dead</a:t>
             </a:r>
             <a:endParaRPr lang="en-US" sz="1600" dirty="0"/>
           </a:p>
@@ -4396,8 +4343,8 @@
         </p:nvSpPr>
         <p:spPr>
           <a:xfrm>
-            <a:off x="1097280" y="2743200"/>
-            <a:ext cx="6949440" cy="365760"/>
+            <a:off x="4754880" y="1280160"/>
+            <a:ext cx="3657600" cy="1463040"/>
           </a:xfrm>
           <a:prstGeom prst="rect">
             <a:avLst/>
@@ -4410,23 +4357,42 @@
       </p:sp>
       <p:sp>
         <p:nvSpPr>
-          <p:cNvPr id="7" name="Shape 5"/>
-          <p:cNvSpPr/>
-          <p:nvPr/>
-        </p:nvSpPr>
-        <p:spPr>
-          <a:xfrm>
-            <a:off x="1097280" y="2743200"/>
-            <a:ext cx="54864" cy="365760"/>
-          </a:xfrm>
-          <a:prstGeom prst="rect">
-            <a:avLst/>
-          </a:prstGeom>
-          <a:solidFill>
-            <a:srgbClr val="D97706"/>
-          </a:solidFill>
-          <a:ln/>
-        </p:spPr>
+          <p:cNvPr id="7" name="Text 5"/>
+          <p:cNvSpPr/>
+          <p:nvPr/>
+        </p:nvSpPr>
+        <p:spPr>
+          <a:xfrm>
+            <a:off x="4754880" y="1325880"/>
+            <a:ext cx="3657600" cy="822960"/>
+          </a:xfrm>
+          <a:prstGeom prst="rect">
+            <a:avLst/>
+          </a:prstGeom>
+          <a:noFill/>
+          <a:ln/>
+        </p:spPr>
+        <p:txBody>
+          <a:bodyPr wrap="square" lIns="0" tIns="0" rIns="0" bIns="0" rtlCol="0" anchor="ctr"/>
+          <a:lstStyle/>
+          <a:p>
+            <a:pPr algn="ctr" indent="0" marL="0">
+              <a:buNone/>
+            </a:pPr>
+            <a:r>
+              <a:rPr lang="en-US" sz="5600" b="1" dirty="0">
+                <a:solidFill>
+                  <a:srgbClr val="D97706"/>
+                </a:solidFill>
+                <a:latin typeface="Georgia" pitchFamily="34" charset="0"/>
+                <a:ea typeface="Georgia" pitchFamily="34" charset="-122"/>
+                <a:cs typeface="Georgia" pitchFamily="34" charset="-120"/>
+              </a:rPr>
+              <a:t>200+</a:t>
+            </a:r>
+            <a:endParaRPr lang="en-US" sz="5600" dirty="0"/>
+          </a:p>
+        </p:txBody>
       </p:sp>
       <p:sp>
         <p:nvSpPr>
@@ -4436,24 +4402,24 @@
         </p:nvSpPr>
         <p:spPr>
           <a:xfrm>
-            <a:off x="1417320" y="2743200"/>
-            <a:ext cx="6400800" cy="365760"/>
-          </a:xfrm>
-          <a:prstGeom prst="rect">
-            <a:avLst/>
-          </a:prstGeom>
-          <a:noFill/>
-          <a:ln/>
-        </p:spPr>
-        <p:txBody>
-          <a:bodyPr wrap="square" lIns="0" tIns="0" rIns="0" bIns="0" rtlCol="0" anchor="ctr"/>
-          <a:lstStyle/>
-          <a:p>
-            <a:pPr indent="0" marL="0">
-              <a:buNone/>
-            </a:pPr>
-            <a:r>
-              <a:rPr lang="en-US" sz="1300" dirty="0">
+            <a:off x="4754880" y="2148840"/>
+            <a:ext cx="3657600" cy="365760"/>
+          </a:xfrm>
+          <a:prstGeom prst="rect">
+            <a:avLst/>
+          </a:prstGeom>
+          <a:noFill/>
+          <a:ln/>
+        </p:spPr>
+        <p:txBody>
+          <a:bodyPr wrap="square" lIns="0" tIns="0" rIns="0" bIns="0" rtlCol="0" anchor="ctr"/>
+          <a:lstStyle/>
+          <a:p>
+            <a:pPr algn="ctr" indent="0" marL="0">
+              <a:buNone/>
+            </a:pPr>
+            <a:r>
+              <a:rPr lang="en-US" sz="1600" dirty="0">
                 <a:solidFill>
                   <a:srgbClr val="94A3B8"/>
                 </a:solidFill>
@@ -4461,62 +4427,22 @@
                 <a:ea typeface="Calibri" pitchFamily="34" charset="-122"/>
                 <a:cs typeface="Calibri" pitchFamily="34" charset="-120"/>
               </a:rPr>
-              <a:t>~5% mortality rate. Thousands permanently damaged.</a:t>
-            </a:r>
-            <a:endParaRPr lang="en-US" sz="1300" dirty="0"/>
-          </a:p>
-        </p:txBody>
-      </p:sp>
-      <p:sp>
-        <p:nvSpPr>
-          <p:cNvPr id="9" name="Shape 7"/>
-          <p:cNvSpPr/>
-          <p:nvPr/>
-        </p:nvSpPr>
-        <p:spPr>
-          <a:xfrm>
-            <a:off x="1097280" y="3246120"/>
-            <a:ext cx="6949440" cy="365760"/>
-          </a:xfrm>
-          <a:prstGeom prst="rect">
-            <a:avLst/>
-          </a:prstGeom>
-          <a:solidFill>
-            <a:srgbClr val="1B2A4A"/>
-          </a:solidFill>
-          <a:ln/>
-        </p:spPr>
-      </p:sp>
-      <p:sp>
-        <p:nvSpPr>
-          <p:cNvPr id="10" name="Shape 8"/>
-          <p:cNvSpPr/>
-          <p:nvPr/>
-        </p:nvSpPr>
-        <p:spPr>
-          <a:xfrm>
-            <a:off x="1097280" y="3246120"/>
-            <a:ext cx="54864" cy="365760"/>
-          </a:xfrm>
-          <a:prstGeom prst="rect">
-            <a:avLst/>
-          </a:prstGeom>
-          <a:solidFill>
-            <a:srgbClr val="D97706"/>
-          </a:solidFill>
-          <a:ln/>
-        </p:spPr>
-      </p:sp>
-      <p:sp>
-        <p:nvSpPr>
-          <p:cNvPr id="11" name="Text 9"/>
-          <p:cNvSpPr/>
-          <p:nvPr/>
-        </p:nvSpPr>
-        <p:spPr>
-          <a:xfrm>
-            <a:off x="1417320" y="3246120"/>
-            <a:ext cx="6400800" cy="365760"/>
+              <a:t>accused</a:t>
+            </a:r>
+            <a:endParaRPr lang="en-US" sz="1600" dirty="0"/>
+          </a:p>
+        </p:txBody>
+      </p:sp>
+      <p:sp>
+        <p:nvSpPr>
+          <p:cNvPr id="9" name="Text 7"/>
+          <p:cNvSpPr/>
+          <p:nvPr/>
+        </p:nvSpPr>
+        <p:spPr>
+          <a:xfrm>
+            <a:off x="731520" y="3200400"/>
+            <a:ext cx="7680960" cy="731520"/>
           </a:xfrm>
           <a:prstGeom prst="rect">
             <a:avLst/>
@@ -4529,10 +4455,13 @@
           <a:lstStyle/>
           <a:p>
             <a:pPr indent="0" marL="0">
-              <a:buNone/>
-            </a:pPr>
-            <a:r>
-              <a:rPr lang="en-US" sz="1300" dirty="0">
+              <a:lnSpc>
+                <a:spcPct val="140000"/>
+              </a:lnSpc>
+              <a:buNone/>
+            </a:pPr>
+            <a:r>
+              <a:rPr lang="en-US" sz="1500" dirty="0">
                 <a:solidFill>
                   <a:srgbClr val="94A3B8"/>
                 </a:solidFill>
@@ -4540,78 +4469,19 @@
                 <a:ea typeface="Calibri" pitchFamily="34" charset="-122"/>
                 <a:cs typeface="Calibri" pitchFamily="34" charset="-120"/>
               </a:rPr>
-              <a:t>Freeman performed 4,000 personally — on patients as young as 4.</a:t>
-            </a:r>
-            <a:endParaRPr lang="en-US" sz="1300" dirty="0"/>
-          </a:p>
-        </p:txBody>
-      </p:sp>
-      <p:sp>
-        <p:nvSpPr>
-          <p:cNvPr id="12" name="Shape 10"/>
-          <p:cNvSpPr/>
-          <p:nvPr/>
-        </p:nvSpPr>
-        <p:spPr>
-          <a:xfrm>
-            <a:off x="1097280" y="3749040"/>
-            <a:ext cx="6949440" cy="365760"/>
-          </a:xfrm>
-          <a:prstGeom prst="rect">
-            <a:avLst/>
-          </a:prstGeom>
-          <a:solidFill>
-            <a:srgbClr val="1B2A4A"/>
-          </a:solidFill>
-          <a:ln/>
-        </p:spPr>
-      </p:sp>
-      <p:sp>
-        <p:nvSpPr>
-          <p:cNvPr id="13" name="Shape 11"/>
-          <p:cNvSpPr/>
-          <p:nvPr/>
-        </p:nvSpPr>
-        <p:spPr>
-          <a:xfrm>
-            <a:off x="1097280" y="3749040"/>
-            <a:ext cx="54864" cy="365760"/>
-          </a:xfrm>
-          <a:prstGeom prst="rect">
-            <a:avLst/>
-          </a:prstGeom>
-          <a:solidFill>
-            <a:srgbClr val="D97706"/>
-          </a:solidFill>
-          <a:ln/>
-        </p:spPr>
-      </p:sp>
-      <p:sp>
-        <p:nvSpPr>
-          <p:cNvPr id="14" name="Text 12"/>
-          <p:cNvSpPr/>
-          <p:nvPr/>
-        </p:nvSpPr>
-        <p:spPr>
-          <a:xfrm>
-            <a:off x="1417320" y="3749040"/>
-            <a:ext cx="6400800" cy="365760"/>
-          </a:xfrm>
-          <a:prstGeom prst="rect">
-            <a:avLst/>
-          </a:prstGeom>
-          <a:noFill/>
-          <a:ln/>
-        </p:spPr>
-        <p:txBody>
-          <a:bodyPr wrap="square" lIns="0" tIns="0" rIns="0" bIns="0" rtlCol="0" anchor="ctr"/>
-          <a:lstStyle/>
+              <a:t>Evidence: spectral visions, fits, accusations.</a:t>
+            </a:r>
+            <a:endParaRPr lang="en-US" sz="1500" dirty="0"/>
+          </a:p>
           <a:p>
             <a:pPr indent="0" marL="0">
-              <a:buNone/>
-            </a:pPr>
-            <a:r>
-              <a:rPr lang="en-US" sz="1300" dirty="0">
+              <a:lnSpc>
+                <a:spcPct val="140000"/>
+              </a:lnSpc>
+              <a:buNone/>
+            </a:pPr>
+            <a:r>
+              <a:rPr lang="en-US" sz="1500" dirty="0">
                 <a:solidFill>
                   <a:srgbClr val="94A3B8"/>
                 </a:solidFill>
@@ -4619,9 +4489,9 @@
                 <a:ea typeface="Calibri" pitchFamily="34" charset="-122"/>
                 <a:cs typeface="Calibri" pitchFamily="34" charset="-120"/>
               </a:rPr>
-              <a:t>Celebrated with a Nobel Prize. Soviet Union banned it in 1950.</a:t>
-            </a:r>
-            <a:endParaRPr lang="en-US" sz="1300" dirty="0"/>
+              <a:t>Within years, jurors signed public apologies.</a:t>
+            </a:r>
+            <a:endParaRPr lang="en-US" sz="1500" dirty="0"/>
           </a:p>
         </p:txBody>
       </p:sp>
@@ -4682,7 +4552,7 @@
               <a:buNone/>
             </a:pPr>
             <a:r>
-              <a:rPr lang="en-US" sz="2600" b="1" dirty="0">
+              <a:rPr lang="en-US" sz="2800" b="1" dirty="0">
                 <a:solidFill>
                   <a:srgbClr val="FFFFFF"/>
                 </a:solidFill>
@@ -4690,9 +4560,9 @@
                 <a:ea typeface="Georgia" pitchFamily="34" charset="-122"/>
                 <a:cs typeface="Georgia" pitchFamily="34" charset="-120"/>
               </a:rPr>
-              <a:t>"Refrigerator Mother" Theory (1950s–1970s)</a:t>
-            </a:r>
-            <a:endParaRPr lang="en-US" sz="2600" dirty="0"/>
+              <a:t>Lobotomy Epidemic (1940s–1950s)</a:t>
+            </a:r>
+            <a:endParaRPr lang="en-US" sz="2800" dirty="0"/>
           </a:p>
         </p:txBody>
       </p:sp>
@@ -4704,8 +4574,8 @@
         </p:nvSpPr>
         <p:spPr>
           <a:xfrm>
-            <a:off x="2286000" y="1188720"/>
-            <a:ext cx="4572000" cy="1280160"/>
+            <a:off x="731520" y="1188720"/>
+            <a:ext cx="7680960" cy="1280160"/>
           </a:xfrm>
           <a:prstGeom prst="rect">
             <a:avLst/>
@@ -4724,8 +4594,8 @@
         </p:nvSpPr>
         <p:spPr>
           <a:xfrm>
-            <a:off x="2286000" y="1234440"/>
-            <a:ext cx="4572000" cy="731520"/>
+            <a:off x="731520" y="1188720"/>
+            <a:ext cx="7680960" cy="731520"/>
           </a:xfrm>
           <a:prstGeom prst="rect">
             <a:avLst/>
@@ -4741,7 +4611,7 @@
               <a:buNone/>
             </a:pPr>
             <a:r>
-              <a:rPr lang="en-US" sz="5200" b="1" dirty="0">
+              <a:rPr lang="en-US" sz="5600" b="1" dirty="0">
                 <a:solidFill>
                   <a:srgbClr val="D97706"/>
                 </a:solidFill>
@@ -4749,9 +4619,9 @@
                 <a:ea typeface="Georgia" pitchFamily="34" charset="-122"/>
                 <a:cs typeface="Georgia" pitchFamily="34" charset="-120"/>
               </a:rPr>
-              <a:t>20 years</a:t>
-            </a:r>
-            <a:endParaRPr lang="en-US" sz="5200" dirty="0"/>
+              <a:t>50,000+</a:t>
+            </a:r>
+            <a:endParaRPr lang="en-US" sz="5600" dirty="0"/>
           </a:p>
         </p:txBody>
       </p:sp>
@@ -4763,8 +4633,8 @@
         </p:nvSpPr>
         <p:spPr>
           <a:xfrm>
-            <a:off x="2286000" y="1965960"/>
-            <a:ext cx="4572000" cy="365760"/>
+            <a:off x="731520" y="1920240"/>
+            <a:ext cx="7680960" cy="365760"/>
           </a:xfrm>
           <a:prstGeom prst="rect">
             <a:avLst/>
@@ -4788,7 +4658,7 @@
                 <a:ea typeface="Calibri" pitchFamily="34" charset="-122"/>
                 <a:cs typeface="Calibri" pitchFamily="34" charset="-120"/>
               </a:rPr>
-              <a:t>blaming mothers for autism</a:t>
+              <a:t>lobotomies in the United States</a:t>
             </a:r>
             <a:endParaRPr lang="en-US" sz="1600" dirty="0"/>
           </a:p>
@@ -4796,14 +4666,54 @@
       </p:sp>
       <p:sp>
         <p:nvSpPr>
-          <p:cNvPr id="6" name="Text 4"/>
-          <p:cNvSpPr/>
-          <p:nvPr/>
-        </p:nvSpPr>
-        <p:spPr>
-          <a:xfrm>
-            <a:off x="731520" y="2834640"/>
-            <a:ext cx="7680960" cy="914400"/>
+          <p:cNvPr id="6" name="Shape 4"/>
+          <p:cNvSpPr/>
+          <p:nvPr/>
+        </p:nvSpPr>
+        <p:spPr>
+          <a:xfrm>
+            <a:off x="1097280" y="2743200"/>
+            <a:ext cx="6949440" cy="365760"/>
+          </a:xfrm>
+          <a:prstGeom prst="rect">
+            <a:avLst/>
+          </a:prstGeom>
+          <a:solidFill>
+            <a:srgbClr val="1B2A4A"/>
+          </a:solidFill>
+          <a:ln/>
+        </p:spPr>
+      </p:sp>
+      <p:sp>
+        <p:nvSpPr>
+          <p:cNvPr id="7" name="Shape 5"/>
+          <p:cNvSpPr/>
+          <p:nvPr/>
+        </p:nvSpPr>
+        <p:spPr>
+          <a:xfrm>
+            <a:off x="1097280" y="2743200"/>
+            <a:ext cx="54864" cy="365760"/>
+          </a:xfrm>
+          <a:prstGeom prst="rect">
+            <a:avLst/>
+          </a:prstGeom>
+          <a:solidFill>
+            <a:srgbClr val="D97706"/>
+          </a:solidFill>
+          <a:ln/>
+        </p:spPr>
+      </p:sp>
+      <p:sp>
+        <p:nvSpPr>
+          <p:cNvPr id="8" name="Text 6"/>
+          <p:cNvSpPr/>
+          <p:nvPr/>
+        </p:nvSpPr>
+        <p:spPr>
+          <a:xfrm>
+            <a:off x="1417320" y="2743200"/>
+            <a:ext cx="6400800" cy="365760"/>
           </a:xfrm>
           <a:prstGeom prst="rect">
             <a:avLst/>
@@ -4816,13 +4726,10 @@
           <a:lstStyle/>
           <a:p>
             <a:pPr indent="0" marL="0">
-              <a:lnSpc>
-                <a:spcPct val="150000"/>
-              </a:lnSpc>
-              <a:buNone/>
-            </a:pPr>
-            <a:r>
-              <a:rPr lang="en-US" sz="1500" dirty="0">
+              <a:buNone/>
+            </a:pPr>
+            <a:r>
+              <a:rPr lang="en-US" sz="1300" dirty="0">
                 <a:solidFill>
                   <a:srgbClr val="94A3B8"/>
                 </a:solidFill>
@@ -4830,19 +4737,78 @@
                 <a:ea typeface="Calibri" pitchFamily="34" charset="-122"/>
                 <a:cs typeface="Calibri" pitchFamily="34" charset="-120"/>
               </a:rPr>
-              <a:t>Belief: Autism caused by cold, unloving mothers.</a:t>
-            </a:r>
-            <a:endParaRPr lang="en-US" sz="1500" dirty="0"/>
-          </a:p>
+              <a:t>~5% mortality rate. Thousands permanently damaged.</a:t>
+            </a:r>
+            <a:endParaRPr lang="en-US" sz="1300" dirty="0"/>
+          </a:p>
+        </p:txBody>
+      </p:sp>
+      <p:sp>
+        <p:nvSpPr>
+          <p:cNvPr id="9" name="Shape 7"/>
+          <p:cNvSpPr/>
+          <p:nvPr/>
+        </p:nvSpPr>
+        <p:spPr>
+          <a:xfrm>
+            <a:off x="1097280" y="3246120"/>
+            <a:ext cx="6949440" cy="365760"/>
+          </a:xfrm>
+          <a:prstGeom prst="rect">
+            <a:avLst/>
+          </a:prstGeom>
+          <a:solidFill>
+            <a:srgbClr val="1B2A4A"/>
+          </a:solidFill>
+          <a:ln/>
+        </p:spPr>
+      </p:sp>
+      <p:sp>
+        <p:nvSpPr>
+          <p:cNvPr id="10" name="Shape 8"/>
+          <p:cNvSpPr/>
+          <p:nvPr/>
+        </p:nvSpPr>
+        <p:spPr>
+          <a:xfrm>
+            <a:off x="1097280" y="3246120"/>
+            <a:ext cx="54864" cy="365760"/>
+          </a:xfrm>
+          <a:prstGeom prst="rect">
+            <a:avLst/>
+          </a:prstGeom>
+          <a:solidFill>
+            <a:srgbClr val="D97706"/>
+          </a:solidFill>
+          <a:ln/>
+        </p:spPr>
+      </p:sp>
+      <p:sp>
+        <p:nvSpPr>
+          <p:cNvPr id="11" name="Text 9"/>
+          <p:cNvSpPr/>
+          <p:nvPr/>
+        </p:nvSpPr>
+        <p:spPr>
+          <a:xfrm>
+            <a:off x="1417320" y="3246120"/>
+            <a:ext cx="6400800" cy="365760"/>
+          </a:xfrm>
+          <a:prstGeom prst="rect">
+            <a:avLst/>
+          </a:prstGeom>
+          <a:noFill/>
+          <a:ln/>
+        </p:spPr>
+        <p:txBody>
+          <a:bodyPr wrap="square" lIns="0" tIns="0" rIns="0" bIns="0" rtlCol="0" anchor="ctr"/>
+          <a:lstStyle/>
           <a:p>
             <a:pPr indent="0" marL="0">
-              <a:lnSpc>
-                <a:spcPct val="150000"/>
-              </a:lnSpc>
-              <a:buNone/>
-            </a:pPr>
-            <a:r>
-              <a:rPr lang="en-US" sz="1500" dirty="0">
+              <a:buNone/>
+            </a:pPr>
+            <a:r>
+              <a:rPr lang="en-US" sz="1300" dirty="0">
                 <a:solidFill>
                   <a:srgbClr val="94A3B8"/>
                 </a:solidFill>
@@ -4850,19 +4816,78 @@
                 <a:ea typeface="Calibri" pitchFamily="34" charset="-122"/>
                 <a:cs typeface="Calibri" pitchFamily="34" charset="-120"/>
               </a:rPr>
-              <a:t>Evidence: Psychoanalytic interpretation.</a:t>
-            </a:r>
-            <a:endParaRPr lang="en-US" sz="1500" dirty="0"/>
-          </a:p>
+              <a:t>Freeman performed 4,000 personally — on patients as young as 4.</a:t>
+            </a:r>
+            <a:endParaRPr lang="en-US" sz="1300" dirty="0"/>
+          </a:p>
+        </p:txBody>
+      </p:sp>
+      <p:sp>
+        <p:nvSpPr>
+          <p:cNvPr id="12" name="Shape 10"/>
+          <p:cNvSpPr/>
+          <p:nvPr/>
+        </p:nvSpPr>
+        <p:spPr>
+          <a:xfrm>
+            <a:off x="1097280" y="3749040"/>
+            <a:ext cx="6949440" cy="365760"/>
+          </a:xfrm>
+          <a:prstGeom prst="rect">
+            <a:avLst/>
+          </a:prstGeom>
+          <a:solidFill>
+            <a:srgbClr val="1B2A4A"/>
+          </a:solidFill>
+          <a:ln/>
+        </p:spPr>
+      </p:sp>
+      <p:sp>
+        <p:nvSpPr>
+          <p:cNvPr id="13" name="Shape 11"/>
+          <p:cNvSpPr/>
+          <p:nvPr/>
+        </p:nvSpPr>
+        <p:spPr>
+          <a:xfrm>
+            <a:off x="1097280" y="3749040"/>
+            <a:ext cx="54864" cy="365760"/>
+          </a:xfrm>
+          <a:prstGeom prst="rect">
+            <a:avLst/>
+          </a:prstGeom>
+          <a:solidFill>
+            <a:srgbClr val="D97706"/>
+          </a:solidFill>
+          <a:ln/>
+        </p:spPr>
+      </p:sp>
+      <p:sp>
+        <p:nvSpPr>
+          <p:cNvPr id="14" name="Text 12"/>
+          <p:cNvSpPr/>
+          <p:nvPr/>
+        </p:nvSpPr>
+        <p:spPr>
+          <a:xfrm>
+            <a:off x="1417320" y="3749040"/>
+            <a:ext cx="6400800" cy="365760"/>
+          </a:xfrm>
+          <a:prstGeom prst="rect">
+            <a:avLst/>
+          </a:prstGeom>
+          <a:noFill/>
+          <a:ln/>
+        </p:spPr>
+        <p:txBody>
+          <a:bodyPr wrap="square" lIns="0" tIns="0" rIns="0" bIns="0" rtlCol="0" anchor="ctr"/>
+          <a:lstStyle/>
           <a:p>
             <a:pPr indent="0" marL="0">
-              <a:lnSpc>
-                <a:spcPct val="150000"/>
-              </a:lnSpc>
-              <a:buNone/>
-            </a:pPr>
-            <a:r>
-              <a:rPr lang="en-US" sz="1500" dirty="0">
+              <a:buNone/>
+            </a:pPr>
+            <a:r>
+              <a:rPr lang="en-US" sz="1300" dirty="0">
                 <a:solidFill>
                   <a:srgbClr val="94A3B8"/>
                 </a:solidFill>
@@ -4870,48 +4895,9 @@
                 <a:ea typeface="Calibri" pitchFamily="34" charset="-122"/>
                 <a:cs typeface="Calibri" pitchFamily="34" charset="-120"/>
               </a:rPr>
-              <a:t>Children institutionalized. Immense guilt inflicted.</a:t>
-            </a:r>
-            <a:endParaRPr lang="en-US" sz="1500" dirty="0"/>
-          </a:p>
-        </p:txBody>
-      </p:sp>
-      <p:sp>
-        <p:nvSpPr>
-          <p:cNvPr id="7" name="Text 5"/>
-          <p:cNvSpPr/>
-          <p:nvPr/>
-        </p:nvSpPr>
-        <p:spPr>
-          <a:xfrm>
-            <a:off x="731520" y="3931920"/>
-            <a:ext cx="7680960" cy="457200"/>
-          </a:xfrm>
-          <a:prstGeom prst="rect">
-            <a:avLst/>
-          </a:prstGeom>
-          <a:noFill/>
-          <a:ln/>
-        </p:spPr>
-        <p:txBody>
-          <a:bodyPr wrap="square" lIns="0" tIns="0" rIns="0" bIns="0" rtlCol="0" anchor="ctr"/>
-          <a:lstStyle/>
-          <a:p>
-            <a:pPr indent="0" marL="0">
-              <a:buNone/>
-            </a:pPr>
-            <a:r>
-              <a:rPr lang="en-US" sz="1400" i="1" dirty="0">
-                <a:solidFill>
-                  <a:srgbClr val="22D3EE"/>
-                </a:solidFill>
-                <a:latin typeface="Calibri" pitchFamily="34" charset="0"/>
-                <a:ea typeface="Calibri" pitchFamily="34" charset="-122"/>
-                <a:cs typeface="Calibri" pitchFamily="34" charset="-120"/>
-              </a:rPr>
-              <a:t>Bettelheim exposed as fraud who lied about credentials and abused patients.</a:t>
-            </a:r>
-            <a:endParaRPr lang="en-US" sz="1400" dirty="0"/>
+              <a:t>Celebrated with a Nobel Prize. Soviet Union banned it in 1950.</a:t>
+            </a:r>
+            <a:endParaRPr lang="en-US" sz="1300" dirty="0"/>
           </a:p>
         </p:txBody>
       </p:sp>
@@ -4980,7 +4966,7 @@
                 <a:ea typeface="Georgia" pitchFamily="34" charset="-122"/>
                 <a:cs typeface="Georgia" pitchFamily="34" charset="-120"/>
               </a:rPr>
-              <a:t>Recovered Memory Therapy (1980s–1990s)</a:t>
+              <a:t>"Refrigerator Mother" Theory (1950s–1970s)</a:t>
             </a:r>
             <a:endParaRPr lang="en-US" sz="2600" dirty="0"/>
           </a:p>
@@ -4994,8 +4980,8 @@
         </p:nvSpPr>
         <p:spPr>
           <a:xfrm>
-            <a:off x="731520" y="1188720"/>
-            <a:ext cx="3657600" cy="1463040"/>
+            <a:off x="2286000" y="1188720"/>
+            <a:ext cx="4572000" cy="1280160"/>
           </a:xfrm>
           <a:prstGeom prst="rect">
             <a:avLst/>
@@ -5014,8 +5000,8 @@
         </p:nvSpPr>
         <p:spPr>
           <a:xfrm>
-            <a:off x="731520" y="1234440"/>
-            <a:ext cx="3657600" cy="731520"/>
+            <a:off x="2286000" y="1234440"/>
+            <a:ext cx="4572000" cy="731520"/>
           </a:xfrm>
           <a:prstGeom prst="rect">
             <a:avLst/>
@@ -5039,7 +5025,7 @@
                 <a:ea typeface="Georgia" pitchFamily="34" charset="-122"/>
                 <a:cs typeface="Georgia" pitchFamily="34" charset="-120"/>
               </a:rPr>
-              <a:t>~1M</a:t>
+              <a:t>20 years</a:t>
             </a:r>
             <a:endParaRPr lang="en-US" sz="5200" dirty="0"/>
           </a:p>
@@ -5053,8 +5039,8 @@
         </p:nvSpPr>
         <p:spPr>
           <a:xfrm>
-            <a:off x="731520" y="2011680"/>
-            <a:ext cx="3657600" cy="548640"/>
+            <a:off x="2286000" y="1965960"/>
+            <a:ext cx="4572000" cy="365760"/>
           </a:xfrm>
           <a:prstGeom prst="rect">
             <a:avLst/>
@@ -5070,7 +5056,7 @@
               <a:buNone/>
             </a:pPr>
             <a:r>
-              <a:rPr lang="en-US" sz="1400" dirty="0">
+              <a:rPr lang="en-US" sz="1600" dirty="0">
                 <a:solidFill>
                   <a:srgbClr val="94A3B8"/>
                 </a:solidFill>
@@ -5078,16 +5064,41 @@
                 <a:ea typeface="Calibri" pitchFamily="34" charset="-122"/>
                 <a:cs typeface="Calibri" pitchFamily="34" charset="-120"/>
               </a:rPr>
-              <a:t>patients convinced they had</a:t>
-            </a:r>
-            <a:endParaRPr lang="en-US" sz="1400" dirty="0"/>
-          </a:p>
-          <a:p>
-            <a:pPr algn="ctr" indent="0" marL="0">
-              <a:buNone/>
-            </a:pPr>
-            <a:r>
-              <a:rPr lang="en-US" sz="1400" dirty="0">
+              <a:t>blaming mothers for autism</a:t>
+            </a:r>
+            <a:endParaRPr lang="en-US" sz="1600" dirty="0"/>
+          </a:p>
+        </p:txBody>
+      </p:sp>
+      <p:sp>
+        <p:nvSpPr>
+          <p:cNvPr id="6" name="Text 4"/>
+          <p:cNvSpPr/>
+          <p:nvPr/>
+        </p:nvSpPr>
+        <p:spPr>
+          <a:xfrm>
+            <a:off x="731520" y="2834640"/>
+            <a:ext cx="7680960" cy="914400"/>
+          </a:xfrm>
+          <a:prstGeom prst="rect">
+            <a:avLst/>
+          </a:prstGeom>
+          <a:noFill/>
+          <a:ln/>
+        </p:spPr>
+        <p:txBody>
+          <a:bodyPr wrap="square" lIns="0" tIns="0" rIns="0" bIns="0" rtlCol="0" anchor="ctr"/>
+          <a:lstStyle/>
+          <a:p>
+            <a:pPr indent="0" marL="0">
+              <a:lnSpc>
+                <a:spcPct val="150000"/>
+              </a:lnSpc>
+              <a:buNone/>
+            </a:pPr>
+            <a:r>
+              <a:rPr lang="en-US" sz="1500" dirty="0">
                 <a:solidFill>
                   <a:srgbClr val="94A3B8"/>
                 </a:solidFill>
@@ -5095,97 +5106,19 @@
                 <a:ea typeface="Calibri" pitchFamily="34" charset="-122"/>
                 <a:cs typeface="Calibri" pitchFamily="34" charset="-120"/>
               </a:rPr>
-              <a:t>repressed memories</a:t>
-            </a:r>
-            <a:endParaRPr lang="en-US" sz="1400" dirty="0"/>
-          </a:p>
-        </p:txBody>
-      </p:sp>
-      <p:sp>
-        <p:nvSpPr>
-          <p:cNvPr id="6" name="Shape 4"/>
-          <p:cNvSpPr/>
-          <p:nvPr/>
-        </p:nvSpPr>
-        <p:spPr>
-          <a:xfrm>
-            <a:off x="4754880" y="1188720"/>
-            <a:ext cx="3657600" cy="1463040"/>
-          </a:xfrm>
-          <a:prstGeom prst="rect">
-            <a:avLst/>
-          </a:prstGeom>
-          <a:solidFill>
-            <a:srgbClr val="1B2A4A"/>
-          </a:solidFill>
-          <a:ln/>
-        </p:spPr>
-      </p:sp>
-      <p:sp>
-        <p:nvSpPr>
-          <p:cNvPr id="7" name="Text 5"/>
-          <p:cNvSpPr/>
-          <p:nvPr/>
-        </p:nvSpPr>
-        <p:spPr>
-          <a:xfrm>
-            <a:off x="4754880" y="1234440"/>
-            <a:ext cx="3657600" cy="731520"/>
-          </a:xfrm>
-          <a:prstGeom prst="rect">
-            <a:avLst/>
-          </a:prstGeom>
-          <a:noFill/>
-          <a:ln/>
-        </p:spPr>
-        <p:txBody>
-          <a:bodyPr wrap="square" lIns="0" tIns="0" rIns="0" bIns="0" rtlCol="0" anchor="ctr"/>
-          <a:lstStyle/>
-          <a:p>
-            <a:pPr algn="ctr" indent="0" marL="0">
-              <a:buNone/>
-            </a:pPr>
-            <a:r>
-              <a:rPr lang="en-US" sz="5200" b="1" dirty="0">
-                <a:solidFill>
-                  <a:srgbClr val="D97706"/>
-                </a:solidFill>
-                <a:latin typeface="Georgia" pitchFamily="34" charset="0"/>
-                <a:ea typeface="Georgia" pitchFamily="34" charset="-122"/>
-                <a:cs typeface="Georgia" pitchFamily="34" charset="-120"/>
-              </a:rPr>
-              <a:t>10,000s</a:t>
-            </a:r>
-            <a:endParaRPr lang="en-US" sz="5200" dirty="0"/>
-          </a:p>
-        </p:txBody>
-      </p:sp>
-      <p:sp>
-        <p:nvSpPr>
-          <p:cNvPr id="8" name="Text 6"/>
-          <p:cNvSpPr/>
-          <p:nvPr/>
-        </p:nvSpPr>
-        <p:spPr>
-          <a:xfrm>
-            <a:off x="4754880" y="2011680"/>
-            <a:ext cx="3657600" cy="457200"/>
-          </a:xfrm>
-          <a:prstGeom prst="rect">
-            <a:avLst/>
-          </a:prstGeom>
-          <a:noFill/>
-          <a:ln/>
-        </p:spPr>
-        <p:txBody>
-          <a:bodyPr wrap="square" lIns="0" tIns="0" rIns="0" bIns="0" rtlCol="0" anchor="ctr"/>
-          <a:lstStyle/>
-          <a:p>
-            <a:pPr algn="ctr" indent="0" marL="0">
-              <a:buNone/>
-            </a:pPr>
-            <a:r>
-              <a:rPr lang="en-US" sz="1400" dirty="0">
+              <a:t>Belief: Autism caused by cold, unloving mothers.</a:t>
+            </a:r>
+            <a:endParaRPr lang="en-US" sz="1500" dirty="0"/>
+          </a:p>
+          <a:p>
+            <a:pPr indent="0" marL="0">
+              <a:lnSpc>
+                <a:spcPct val="150000"/>
+              </a:lnSpc>
+              <a:buNone/>
+            </a:pPr>
+            <a:r>
+              <a:rPr lang="en-US" sz="1500" dirty="0">
                 <a:solidFill>
                   <a:srgbClr val="94A3B8"/>
                 </a:solidFill>
@@ -5193,36 +5126,14 @@
                 <a:ea typeface="Calibri" pitchFamily="34" charset="-122"/>
                 <a:cs typeface="Calibri" pitchFamily="34" charset="-120"/>
               </a:rPr>
-              <a:t>of families destroyed</a:t>
-            </a:r>
-            <a:endParaRPr lang="en-US" sz="1400" dirty="0"/>
-          </a:p>
-        </p:txBody>
-      </p:sp>
-      <p:sp>
-        <p:nvSpPr>
-          <p:cNvPr id="9" name="Text 7"/>
-          <p:cNvSpPr/>
-          <p:nvPr/>
-        </p:nvSpPr>
-        <p:spPr>
-          <a:xfrm>
-            <a:off x="731520" y="3017520"/>
-            <a:ext cx="7680960" cy="640080"/>
-          </a:xfrm>
-          <a:prstGeom prst="rect">
-            <a:avLst/>
-          </a:prstGeom>
-          <a:noFill/>
-          <a:ln/>
-        </p:spPr>
-        <p:txBody>
-          <a:bodyPr wrap="square" lIns="0" tIns="0" rIns="0" bIns="0" rtlCol="0" anchor="ctr"/>
-          <a:lstStyle/>
+              <a:t>Evidence: Psychoanalytic interpretation.</a:t>
+            </a:r>
+            <a:endParaRPr lang="en-US" sz="1500" dirty="0"/>
+          </a:p>
           <a:p>
             <a:pPr indent="0" marL="0">
               <a:lnSpc>
-                <a:spcPct val="140000"/>
+                <a:spcPct val="150000"/>
               </a:lnSpc>
               <a:buNone/>
             </a:pPr>
@@ -5235,29 +5146,48 @@
                 <a:ea typeface="Calibri" pitchFamily="34" charset="-122"/>
                 <a:cs typeface="Calibri" pitchFamily="34" charset="-120"/>
               </a:rPr>
-              <a:t>People imprisoned on false accusations.</a:t>
+              <a:t>Children institutionalized. Immense guilt inflicted.</a:t>
             </a:r>
             <a:endParaRPr lang="en-US" sz="1500" dirty="0"/>
           </a:p>
+        </p:txBody>
+      </p:sp>
+      <p:sp>
+        <p:nvSpPr>
+          <p:cNvPr id="7" name="Text 5"/>
+          <p:cNvSpPr/>
+          <p:nvPr/>
+        </p:nvSpPr>
+        <p:spPr>
+          <a:xfrm>
+            <a:off x="731520" y="3931920"/>
+            <a:ext cx="7680960" cy="457200"/>
+          </a:xfrm>
+          <a:prstGeom prst="rect">
+            <a:avLst/>
+          </a:prstGeom>
+          <a:noFill/>
+          <a:ln/>
+        </p:spPr>
+        <p:txBody>
+          <a:bodyPr wrap="square" lIns="0" tIns="0" rIns="0" bIns="0" rtlCol="0" anchor="ctr"/>
+          <a:lstStyle/>
           <a:p>
             <a:pPr indent="0" marL="0">
-              <a:lnSpc>
-                <a:spcPct val="140000"/>
-              </a:lnSpc>
-              <a:buNone/>
-            </a:pPr>
-            <a:r>
-              <a:rPr lang="en-US" sz="1500" dirty="0">
-                <a:solidFill>
-                  <a:srgbClr val="94A3B8"/>
+              <a:buNone/>
+            </a:pPr>
+            <a:r>
+              <a:rPr lang="en-US" sz="1400" i="1" dirty="0">
+                <a:solidFill>
+                  <a:srgbClr val="22D3EE"/>
                 </a:solidFill>
                 <a:latin typeface="Calibri" pitchFamily="34" charset="0"/>
                 <a:ea typeface="Calibri" pitchFamily="34" charset="-122"/>
                 <a:cs typeface="Calibri" pitchFamily="34" charset="-120"/>
               </a:rPr>
-              <a:t>FBI found zero evidence of satanic abuse.</a:t>
-            </a:r>
-            <a:endParaRPr lang="en-US" sz="1500" dirty="0"/>
+              <a:t>Bettelheim exposed as fraud who lied about credentials and abused patients.</a:t>
+            </a:r>
+            <a:endParaRPr lang="en-US" sz="1400" dirty="0"/>
           </a:p>
         </p:txBody>
       </p:sp>
@@ -5301,8 +5231,8 @@
         </p:nvSpPr>
         <p:spPr>
           <a:xfrm>
-            <a:off x="731520" y="365760"/>
-            <a:ext cx="7680960" cy="640080"/>
+            <a:off x="731520" y="274320"/>
+            <a:ext cx="7680960" cy="548640"/>
           </a:xfrm>
           <a:prstGeom prst="rect">
             <a:avLst/>
@@ -5318,7 +5248,7 @@
               <a:buNone/>
             </a:pPr>
             <a:r>
-              <a:rPr lang="en-US" sz="2800" b="1" dirty="0">
+              <a:rPr lang="en-US" sz="2600" b="1" dirty="0">
                 <a:solidFill>
                   <a:srgbClr val="FFFFFF"/>
                 </a:solidFill>
@@ -5326,22 +5256,61 @@
                 <a:ea typeface="Georgia" pitchFamily="34" charset="-122"/>
                 <a:cs typeface="Georgia" pitchFamily="34" charset="-120"/>
               </a:rPr>
-              <a:t>Satanic Panic &amp; MPD Epidemic</a:t>
-            </a:r>
-            <a:endParaRPr lang="en-US" sz="2800" dirty="0"/>
-          </a:p>
-        </p:txBody>
-      </p:sp>
-      <p:sp>
-        <p:nvSpPr>
-          <p:cNvPr id="3" name="Shape 1"/>
-          <p:cNvSpPr/>
-          <p:nvPr/>
-        </p:nvSpPr>
-        <p:spPr>
-          <a:xfrm>
-            <a:off x="731520" y="1188720"/>
-            <a:ext cx="3657600" cy="2286000"/>
+              <a:t>The Recovered Memory Catastrophe</a:t>
+            </a:r>
+            <a:endParaRPr lang="en-US" sz="2600" dirty="0"/>
+          </a:p>
+        </p:txBody>
+      </p:sp>
+      <p:sp>
+        <p:nvSpPr>
+          <p:cNvPr id="3" name="Text 1"/>
+          <p:cNvSpPr/>
+          <p:nvPr/>
+        </p:nvSpPr>
+        <p:spPr>
+          <a:xfrm>
+            <a:off x="731520" y="777240"/>
+            <a:ext cx="7680960" cy="365760"/>
+          </a:xfrm>
+          <a:prstGeom prst="rect">
+            <a:avLst/>
+          </a:prstGeom>
+          <a:noFill/>
+          <a:ln/>
+        </p:spPr>
+        <p:txBody>
+          <a:bodyPr wrap="square" lIns="0" tIns="0" rIns="0" bIns="0" rtlCol="0" anchor="ctr"/>
+          <a:lstStyle/>
+          <a:p>
+            <a:pPr indent="0" marL="0">
+              <a:buNone/>
+            </a:pPr>
+            <a:r>
+              <a:rPr lang="en-US" sz="1700" b="1" i="1" dirty="0">
+                <a:solidFill>
+                  <a:srgbClr val="22D3EE"/>
+                </a:solidFill>
+                <a:latin typeface="Georgia" pitchFamily="34" charset="0"/>
+                <a:ea typeface="Georgia" pitchFamily="34" charset="-122"/>
+                <a:cs typeface="Georgia" pitchFamily="34" charset="-120"/>
+              </a:rPr>
+              <a:t>1 engine.  3 disasters.  Zero evidence.</a:t>
+            </a:r>
+            <a:endParaRPr lang="en-US" sz="1700" dirty="0"/>
+          </a:p>
+        </p:txBody>
+      </p:sp>
+      <p:sp>
+        <p:nvSpPr>
+          <p:cNvPr id="4" name="Shape 2"/>
+          <p:cNvSpPr/>
+          <p:nvPr/>
+        </p:nvSpPr>
+        <p:spPr>
+          <a:xfrm>
+            <a:off x="457200" y="1371600"/>
+            <a:ext cx="2606040" cy="2468880"/>
           </a:xfrm>
           <a:prstGeom prst="rect">
             <a:avLst/>
@@ -5354,14 +5323,34 @@
       </p:sp>
       <p:sp>
         <p:nvSpPr>
-          <p:cNvPr id="4" name="Text 2"/>
-          <p:cNvSpPr/>
-          <p:nvPr/>
-        </p:nvSpPr>
-        <p:spPr>
-          <a:xfrm>
-            <a:off x="731520" y="1234440"/>
-            <a:ext cx="3657600" cy="365760"/>
+          <p:cNvPr id="5" name="Shape 3"/>
+          <p:cNvSpPr/>
+          <p:nvPr/>
+        </p:nvSpPr>
+        <p:spPr>
+          <a:xfrm>
+            <a:off x="457200" y="1371600"/>
+            <a:ext cx="2606040" cy="54864"/>
+          </a:xfrm>
+          <a:prstGeom prst="rect">
+            <a:avLst/>
+          </a:prstGeom>
+          <a:solidFill>
+            <a:srgbClr val="D97706"/>
+          </a:solidFill>
+          <a:ln/>
+        </p:spPr>
+      </p:sp>
+      <p:sp>
+        <p:nvSpPr>
+          <p:cNvPr id="6" name="Text 4"/>
+          <p:cNvSpPr/>
+          <p:nvPr/>
+        </p:nvSpPr>
+        <p:spPr>
+          <a:xfrm>
+            <a:off x="457200" y="1508760"/>
+            <a:ext cx="2606040" cy="320040"/>
           </a:xfrm>
           <a:prstGeom prst="rect">
             <a:avLst/>
@@ -5377,7 +5366,7 @@
               <a:buNone/>
             </a:pPr>
             <a:r>
-              <a:rPr lang="en-US" sz="1800" b="1" dirty="0">
+              <a:rPr lang="en-US" sz="1400" b="1" dirty="0">
                 <a:solidFill>
                   <a:srgbClr val="22D3EE"/>
                 </a:solidFill>
@@ -5385,22 +5374,22 @@
                 <a:ea typeface="Calibri" pitchFamily="34" charset="-122"/>
                 <a:cs typeface="Calibri" pitchFamily="34" charset="-120"/>
               </a:rPr>
-              <a:t>Satanic Panic</a:t>
-            </a:r>
-            <a:endParaRPr lang="en-US" sz="1800" dirty="0"/>
-          </a:p>
-        </p:txBody>
-      </p:sp>
-      <p:sp>
-        <p:nvSpPr>
-          <p:cNvPr id="5" name="Text 3"/>
-          <p:cNvSpPr/>
-          <p:nvPr/>
-        </p:nvSpPr>
-        <p:spPr>
-          <a:xfrm>
-            <a:off x="731520" y="1645920"/>
-            <a:ext cx="3657600" cy="640080"/>
+              <a:t>Recovered Memory</a:t>
+            </a:r>
+            <a:endParaRPr lang="en-US" sz="1400" dirty="0"/>
+          </a:p>
+        </p:txBody>
+      </p:sp>
+      <p:sp>
+        <p:nvSpPr>
+          <p:cNvPr id="7" name="Text 5"/>
+          <p:cNvSpPr/>
+          <p:nvPr/>
+        </p:nvSpPr>
+        <p:spPr>
+          <a:xfrm>
+            <a:off x="457200" y="1828800"/>
+            <a:ext cx="2606040" cy="502920"/>
           </a:xfrm>
           <a:prstGeom prst="rect">
             <a:avLst/>
@@ -5416,7 +5405,7 @@
               <a:buNone/>
             </a:pPr>
             <a:r>
-              <a:rPr lang="en-US" sz="4400" b="1" dirty="0">
+              <a:rPr lang="en-US" sz="4000" b="1" dirty="0">
                 <a:solidFill>
                   <a:srgbClr val="D97706"/>
                 </a:solidFill>
@@ -5424,22 +5413,22 @@
                 <a:ea typeface="Georgia" pitchFamily="34" charset="-122"/>
                 <a:cs typeface="Georgia" pitchFamily="34" charset="-120"/>
               </a:rPr>
-              <a:t>12,000+</a:t>
-            </a:r>
-            <a:endParaRPr lang="en-US" sz="4400" dirty="0"/>
-          </a:p>
-        </p:txBody>
-      </p:sp>
-      <p:sp>
-        <p:nvSpPr>
-          <p:cNvPr id="6" name="Text 4"/>
-          <p:cNvSpPr/>
-          <p:nvPr/>
-        </p:nvSpPr>
-        <p:spPr>
-          <a:xfrm>
-            <a:off x="731520" y="2286000"/>
-            <a:ext cx="3657600" cy="320040"/>
+              <a:t>~1M</a:t>
+            </a:r>
+            <a:endParaRPr lang="en-US" sz="4000" dirty="0"/>
+          </a:p>
+        </p:txBody>
+      </p:sp>
+      <p:sp>
+        <p:nvSpPr>
+          <p:cNvPr id="8" name="Text 6"/>
+          <p:cNvSpPr/>
+          <p:nvPr/>
+        </p:nvSpPr>
+        <p:spPr>
+          <a:xfrm>
+            <a:off x="640080" y="2331720"/>
+            <a:ext cx="2240280" cy="457200"/>
           </a:xfrm>
           <a:prstGeom prst="rect">
             <a:avLst/>
@@ -5455,7 +5444,7 @@
               <a:buNone/>
             </a:pPr>
             <a:r>
-              <a:rPr lang="en-US" sz="1400" dirty="0">
+              <a:rPr lang="en-US" sz="1200" dirty="0">
                 <a:solidFill>
                   <a:srgbClr val="94A3B8"/>
                 </a:solidFill>
@@ -5463,38 +5452,16 @@
                 <a:ea typeface="Calibri" pitchFamily="34" charset="-122"/>
                 <a:cs typeface="Calibri" pitchFamily="34" charset="-120"/>
               </a:rPr>
-              <a:t>cases alleged</a:t>
-            </a:r>
-            <a:endParaRPr lang="en-US" sz="1400" dirty="0"/>
-          </a:p>
-        </p:txBody>
-      </p:sp>
-      <p:sp>
-        <p:nvSpPr>
-          <p:cNvPr id="7" name="Text 5"/>
-          <p:cNvSpPr/>
-          <p:nvPr/>
-        </p:nvSpPr>
-        <p:spPr>
-          <a:xfrm>
-            <a:off x="1005840" y="2743200"/>
-            <a:ext cx="3108960" cy="548640"/>
-          </a:xfrm>
-          <a:prstGeom prst="rect">
-            <a:avLst/>
-          </a:prstGeom>
-          <a:noFill/>
-          <a:ln/>
-        </p:spPr>
-        <p:txBody>
-          <a:bodyPr wrap="square" lIns="0" tIns="0" rIns="0" bIns="0" rtlCol="0" anchor="ctr"/>
-          <a:lstStyle/>
+              <a:t>patients convinced of</a:t>
+            </a:r>
+            <a:endParaRPr lang="en-US" sz="1200" dirty="0"/>
+          </a:p>
           <a:p>
             <a:pPr algn="ctr" indent="0" marL="0">
               <a:buNone/>
             </a:pPr>
             <a:r>
-              <a:rPr lang="en-US" sz="1300" dirty="0">
+              <a:rPr lang="en-US" sz="1200" dirty="0">
                 <a:solidFill>
                   <a:srgbClr val="94A3B8"/>
                 </a:solidFill>
@@ -5502,16 +5469,41 @@
                 <a:ea typeface="Calibri" pitchFamily="34" charset="-122"/>
                 <a:cs typeface="Calibri" pitchFamily="34" charset="-120"/>
               </a:rPr>
-              <a:t>McMartin: 7 years, $15M,</a:t>
-            </a:r>
-            <a:endParaRPr lang="en-US" sz="1300" dirty="0"/>
-          </a:p>
+              <a:t>repressed memories</a:t>
+            </a:r>
+            <a:endParaRPr lang="en-US" sz="1200" dirty="0"/>
+          </a:p>
+        </p:txBody>
+      </p:sp>
+      <p:sp>
+        <p:nvSpPr>
+          <p:cNvPr id="9" name="Text 7"/>
+          <p:cNvSpPr/>
+          <p:nvPr/>
+        </p:nvSpPr>
+        <p:spPr>
+          <a:xfrm>
+            <a:off x="640080" y="2880360"/>
+            <a:ext cx="2240280" cy="640080"/>
+          </a:xfrm>
+          <a:prstGeom prst="rect">
+            <a:avLst/>
+          </a:prstGeom>
+          <a:noFill/>
+          <a:ln/>
+        </p:spPr>
+        <p:txBody>
+          <a:bodyPr wrap="square" lIns="0" tIns="0" rIns="0" bIns="0" rtlCol="0" anchor="ctr"/>
+          <a:lstStyle/>
           <a:p>
             <a:pPr algn="ctr" indent="0" marL="0">
-              <a:buNone/>
-            </a:pPr>
-            <a:r>
-              <a:rPr lang="en-US" sz="1300" dirty="0">
+              <a:lnSpc>
+                <a:spcPct val="130000"/>
+              </a:lnSpc>
+              <a:buNone/>
+            </a:pPr>
+            <a:r>
+              <a:rPr lang="en-US" sz="1100" dirty="0">
                 <a:solidFill>
                   <a:srgbClr val="94A3B8"/>
                 </a:solidFill>
@@ -5519,22 +5511,62 @@
                 <a:ea typeface="Calibri" pitchFamily="34" charset="-122"/>
                 <a:cs typeface="Calibri" pitchFamily="34" charset="-120"/>
               </a:rPr>
-              <a:t>zero convictions.</a:t>
-            </a:r>
-            <a:endParaRPr lang="en-US" sz="1300" dirty="0"/>
-          </a:p>
-        </p:txBody>
-      </p:sp>
-      <p:sp>
-        <p:nvSpPr>
-          <p:cNvPr id="8" name="Shape 6"/>
-          <p:cNvSpPr/>
-          <p:nvPr/>
-        </p:nvSpPr>
-        <p:spPr>
-          <a:xfrm>
-            <a:off x="4754880" y="1188720"/>
-            <a:ext cx="3657600" cy="2286000"/>
+              <a:t>Tens of thousands of</a:t>
+            </a:r>
+            <a:endParaRPr lang="en-US" sz="1100" dirty="0"/>
+          </a:p>
+          <a:p>
+            <a:pPr algn="ctr" indent="0" marL="0">
+              <a:lnSpc>
+                <a:spcPct val="130000"/>
+              </a:lnSpc>
+              <a:buNone/>
+            </a:pPr>
+            <a:r>
+              <a:rPr lang="en-US" sz="1100" dirty="0">
+                <a:solidFill>
+                  <a:srgbClr val="94A3B8"/>
+                </a:solidFill>
+                <a:latin typeface="Calibri" pitchFamily="34" charset="0"/>
+                <a:ea typeface="Calibri" pitchFamily="34" charset="-122"/>
+                <a:cs typeface="Calibri" pitchFamily="34" charset="-120"/>
+              </a:rPr>
+              <a:t>families destroyed.</a:t>
+            </a:r>
+            <a:endParaRPr lang="en-US" sz="1100" dirty="0"/>
+          </a:p>
+          <a:p>
+            <a:pPr algn="ctr" indent="0" marL="0">
+              <a:lnSpc>
+                <a:spcPct val="130000"/>
+              </a:lnSpc>
+              <a:buNone/>
+            </a:pPr>
+            <a:r>
+              <a:rPr lang="en-US" sz="1100" dirty="0">
+                <a:solidFill>
+                  <a:srgbClr val="94A3B8"/>
+                </a:solidFill>
+                <a:latin typeface="Calibri" pitchFamily="34" charset="0"/>
+                <a:ea typeface="Calibri" pitchFamily="34" charset="-122"/>
+                <a:cs typeface="Calibri" pitchFamily="34" charset="-120"/>
+              </a:rPr>
+              <a:t>People imprisoned.</a:t>
+            </a:r>
+            <a:endParaRPr lang="en-US" sz="1100" dirty="0"/>
+          </a:p>
+        </p:txBody>
+      </p:sp>
+      <p:sp>
+        <p:nvSpPr>
+          <p:cNvPr id="10" name="Shape 8"/>
+          <p:cNvSpPr/>
+          <p:nvPr/>
+        </p:nvSpPr>
+        <p:spPr>
+          <a:xfrm>
+            <a:off x="3268980" y="1371600"/>
+            <a:ext cx="2606040" cy="2468880"/>
           </a:xfrm>
           <a:prstGeom prst="rect">
             <a:avLst/>
@@ -5547,14 +5579,34 @@
       </p:sp>
       <p:sp>
         <p:nvSpPr>
-          <p:cNvPr id="9" name="Text 7"/>
-          <p:cNvSpPr/>
-          <p:nvPr/>
-        </p:nvSpPr>
-        <p:spPr>
-          <a:xfrm>
-            <a:off x="4754880" y="1234440"/>
-            <a:ext cx="3657600" cy="365760"/>
+          <p:cNvPr id="11" name="Shape 9"/>
+          <p:cNvSpPr/>
+          <p:nvPr/>
+        </p:nvSpPr>
+        <p:spPr>
+          <a:xfrm>
+            <a:off x="3268980" y="1371600"/>
+            <a:ext cx="2606040" cy="54864"/>
+          </a:xfrm>
+          <a:prstGeom prst="rect">
+            <a:avLst/>
+          </a:prstGeom>
+          <a:solidFill>
+            <a:srgbClr val="D97706"/>
+          </a:solidFill>
+          <a:ln/>
+        </p:spPr>
+      </p:sp>
+      <p:sp>
+        <p:nvSpPr>
+          <p:cNvPr id="12" name="Text 10"/>
+          <p:cNvSpPr/>
+          <p:nvPr/>
+        </p:nvSpPr>
+        <p:spPr>
+          <a:xfrm>
+            <a:off x="3268980" y="1508760"/>
+            <a:ext cx="2606040" cy="320040"/>
           </a:xfrm>
           <a:prstGeom prst="rect">
             <a:avLst/>
@@ -5570,7 +5622,7 @@
               <a:buNone/>
             </a:pPr>
             <a:r>
-              <a:rPr lang="en-US" sz="1800" b="1" dirty="0">
+              <a:rPr lang="en-US" sz="1400" b="1" dirty="0">
                 <a:solidFill>
                   <a:srgbClr val="22D3EE"/>
                 </a:solidFill>
@@ -5580,20 +5632,20 @@
               </a:rPr>
               <a:t>MPD/DID Epidemic</a:t>
             </a:r>
-            <a:endParaRPr lang="en-US" sz="1800" dirty="0"/>
-          </a:p>
-        </p:txBody>
-      </p:sp>
-      <p:sp>
-        <p:nvSpPr>
-          <p:cNvPr id="10" name="Text 8"/>
-          <p:cNvSpPr/>
-          <p:nvPr/>
-        </p:nvSpPr>
-        <p:spPr>
-          <a:xfrm>
-            <a:off x="4754880" y="1645920"/>
-            <a:ext cx="3657600" cy="640080"/>
+            <a:endParaRPr lang="en-US" sz="1400" dirty="0"/>
+          </a:p>
+        </p:txBody>
+      </p:sp>
+      <p:sp>
+        <p:nvSpPr>
+          <p:cNvPr id="13" name="Text 11"/>
+          <p:cNvSpPr/>
+          <p:nvPr/>
+        </p:nvSpPr>
+        <p:spPr>
+          <a:xfrm>
+            <a:off x="3268980" y="1828800"/>
+            <a:ext cx="2606040" cy="502920"/>
           </a:xfrm>
           <a:prstGeom prst="rect">
             <a:avLst/>
@@ -5609,7 +5661,7 @@
               <a:buNone/>
             </a:pPr>
             <a:r>
-              <a:rPr lang="en-US" sz="4400" b="1" dirty="0">
+              <a:rPr lang="en-US" sz="4000" b="1" dirty="0">
                 <a:solidFill>
                   <a:srgbClr val="D97706"/>
                 </a:solidFill>
@@ -5619,20 +5671,20 @@
               </a:rPr>
               <a:t>50,000</a:t>
             </a:r>
-            <a:endParaRPr lang="en-US" sz="4400" dirty="0"/>
-          </a:p>
-        </p:txBody>
-      </p:sp>
-      <p:sp>
-        <p:nvSpPr>
-          <p:cNvPr id="11" name="Text 9"/>
-          <p:cNvSpPr/>
-          <p:nvPr/>
-        </p:nvSpPr>
-        <p:spPr>
-          <a:xfrm>
-            <a:off x="5029200" y="2286000"/>
-            <a:ext cx="3108960" cy="320040"/>
+            <a:endParaRPr lang="en-US" sz="4000" dirty="0"/>
+          </a:p>
+        </p:txBody>
+      </p:sp>
+      <p:sp>
+        <p:nvSpPr>
+          <p:cNvPr id="14" name="Text 12"/>
+          <p:cNvSpPr/>
+          <p:nvPr/>
+        </p:nvSpPr>
+        <p:spPr>
+          <a:xfrm>
+            <a:off x="3451860" y="2331720"/>
+            <a:ext cx="2240280" cy="457200"/>
           </a:xfrm>
           <a:prstGeom prst="rect">
             <a:avLst/>
@@ -5648,7 +5700,7 @@
               <a:buNone/>
             </a:pPr>
             <a:r>
-              <a:rPr lang="en-US" sz="1400" dirty="0">
+              <a:rPr lang="en-US" sz="1200" dirty="0">
                 <a:solidFill>
                   <a:srgbClr val="94A3B8"/>
                 </a:solidFill>
@@ -5656,38 +5708,16 @@
                 <a:ea typeface="Calibri" pitchFamily="34" charset="-122"/>
                 <a:cs typeface="Calibri" pitchFamily="34" charset="-120"/>
               </a:rPr>
-              <a:t>diagnoses vs. ~200 in all prior history</a:t>
-            </a:r>
-            <a:endParaRPr lang="en-US" sz="1400" dirty="0"/>
-          </a:p>
-        </p:txBody>
-      </p:sp>
-      <p:sp>
-        <p:nvSpPr>
-          <p:cNvPr id="12" name="Text 10"/>
-          <p:cNvSpPr/>
-          <p:nvPr/>
-        </p:nvSpPr>
-        <p:spPr>
-          <a:xfrm>
-            <a:off x="5029200" y="2743200"/>
-            <a:ext cx="3108960" cy="548640"/>
-          </a:xfrm>
-          <a:prstGeom prst="rect">
-            <a:avLst/>
-          </a:prstGeom>
-          <a:noFill/>
-          <a:ln/>
-        </p:spPr>
-        <p:txBody>
-          <a:bodyPr wrap="square" lIns="0" tIns="0" rIns="0" bIns="0" rtlCol="0" anchor="ctr"/>
-          <a:lstStyle/>
+              <a:t>diagnoses vs. ~200</a:t>
+            </a:r>
+            <a:endParaRPr lang="en-US" sz="1200" dirty="0"/>
+          </a:p>
           <a:p>
             <a:pPr algn="ctr" indent="0" marL="0">
               <a:buNone/>
             </a:pPr>
             <a:r>
-              <a:rPr lang="en-US" sz="1300" dirty="0">
+              <a:rPr lang="en-US" sz="1200" dirty="0">
                 <a:solidFill>
                   <a:srgbClr val="94A3B8"/>
                 </a:solidFill>
@@ -5695,16 +5725,41 @@
                 <a:ea typeface="Calibri" pitchFamily="34" charset="-122"/>
                 <a:cs typeface="Calibri" pitchFamily="34" charset="-120"/>
               </a:rPr>
-              <a:t>Largely iatrogenic — created</a:t>
-            </a:r>
-            <a:endParaRPr lang="en-US" sz="1300" dirty="0"/>
-          </a:p>
+              <a:t>in all prior history</a:t>
+            </a:r>
+            <a:endParaRPr lang="en-US" sz="1200" dirty="0"/>
+          </a:p>
+        </p:txBody>
+      </p:sp>
+      <p:sp>
+        <p:nvSpPr>
+          <p:cNvPr id="15" name="Text 13"/>
+          <p:cNvSpPr/>
+          <p:nvPr/>
+        </p:nvSpPr>
+        <p:spPr>
+          <a:xfrm>
+            <a:off x="3451860" y="2880360"/>
+            <a:ext cx="2240280" cy="640080"/>
+          </a:xfrm>
+          <a:prstGeom prst="rect">
+            <a:avLst/>
+          </a:prstGeom>
+          <a:noFill/>
+          <a:ln/>
+        </p:spPr>
+        <p:txBody>
+          <a:bodyPr wrap="square" lIns="0" tIns="0" rIns="0" bIns="0" rtlCol="0" anchor="ctr"/>
+          <a:lstStyle/>
           <a:p>
             <a:pPr algn="ctr" indent="0" marL="0">
-              <a:buNone/>
-            </a:pPr>
-            <a:r>
-              <a:rPr lang="en-US" sz="1300" dirty="0">
+              <a:lnSpc>
+                <a:spcPct val="130000"/>
+              </a:lnSpc>
+              <a:buNone/>
+            </a:pPr>
+            <a:r>
+              <a:rPr lang="en-US" sz="1100" dirty="0">
                 <a:solidFill>
                   <a:srgbClr val="94A3B8"/>
                 </a:solidFill>
@@ -5712,7 +5767,325 @@
                 <a:ea typeface="Calibri" pitchFamily="34" charset="-122"/>
                 <a:cs typeface="Calibri" pitchFamily="34" charset="-120"/>
               </a:rPr>
-              <a:t>by the therapy itself.</a:t>
+              <a:t>Iatrogenic — created by</a:t>
+            </a:r>
+            <a:endParaRPr lang="en-US" sz="1100" dirty="0"/>
+          </a:p>
+          <a:p>
+            <a:pPr algn="ctr" indent="0" marL="0">
+              <a:lnSpc>
+                <a:spcPct val="130000"/>
+              </a:lnSpc>
+              <a:buNone/>
+            </a:pPr>
+            <a:r>
+              <a:rPr lang="en-US" sz="1100" dirty="0">
+                <a:solidFill>
+                  <a:srgbClr val="94A3B8"/>
+                </a:solidFill>
+                <a:latin typeface="Calibri" pitchFamily="34" charset="0"/>
+                <a:ea typeface="Calibri" pitchFamily="34" charset="-122"/>
+                <a:cs typeface="Calibri" pitchFamily="34" charset="-120"/>
+              </a:rPr>
+              <a:t>the therapy itself.</a:t>
+            </a:r>
+            <a:endParaRPr lang="en-US" sz="1100" dirty="0"/>
+          </a:p>
+          <a:p>
+            <a:pPr algn="ctr" indent="0" marL="0">
+              <a:lnSpc>
+                <a:spcPct val="130000"/>
+              </a:lnSpc>
+              <a:buNone/>
+            </a:pPr>
+            <a:r>
+              <a:rPr lang="en-US" sz="1100" dirty="0">
+                <a:solidFill>
+                  <a:srgbClr val="94A3B8"/>
+                </a:solidFill>
+                <a:latin typeface="Calibri" pitchFamily="34" charset="0"/>
+                <a:ea typeface="Calibri" pitchFamily="34" charset="-122"/>
+                <a:cs typeface="Calibri" pitchFamily="34" charset="-120"/>
+              </a:rPr>
+              <a:t>Disappeared when stopped.</a:t>
+            </a:r>
+            <a:endParaRPr lang="en-US" sz="1100" dirty="0"/>
+          </a:p>
+        </p:txBody>
+      </p:sp>
+      <p:sp>
+        <p:nvSpPr>
+          <p:cNvPr id="16" name="Shape 14"/>
+          <p:cNvSpPr/>
+          <p:nvPr/>
+        </p:nvSpPr>
+        <p:spPr>
+          <a:xfrm>
+            <a:off x="6080760" y="1371600"/>
+            <a:ext cx="2606040" cy="2468880"/>
+          </a:xfrm>
+          <a:prstGeom prst="rect">
+            <a:avLst/>
+          </a:prstGeom>
+          <a:solidFill>
+            <a:srgbClr val="1B2A4A"/>
+          </a:solidFill>
+          <a:ln/>
+        </p:spPr>
+      </p:sp>
+      <p:sp>
+        <p:nvSpPr>
+          <p:cNvPr id="17" name="Shape 15"/>
+          <p:cNvSpPr/>
+          <p:nvPr/>
+        </p:nvSpPr>
+        <p:spPr>
+          <a:xfrm>
+            <a:off x="6080760" y="1371600"/>
+            <a:ext cx="2606040" cy="54864"/>
+          </a:xfrm>
+          <a:prstGeom prst="rect">
+            <a:avLst/>
+          </a:prstGeom>
+          <a:solidFill>
+            <a:srgbClr val="D97706"/>
+          </a:solidFill>
+          <a:ln/>
+        </p:spPr>
+      </p:sp>
+      <p:sp>
+        <p:nvSpPr>
+          <p:cNvPr id="18" name="Text 16"/>
+          <p:cNvSpPr/>
+          <p:nvPr/>
+        </p:nvSpPr>
+        <p:spPr>
+          <a:xfrm>
+            <a:off x="6080760" y="1508760"/>
+            <a:ext cx="2606040" cy="320040"/>
+          </a:xfrm>
+          <a:prstGeom prst="rect">
+            <a:avLst/>
+          </a:prstGeom>
+          <a:noFill/>
+          <a:ln/>
+        </p:spPr>
+        <p:txBody>
+          <a:bodyPr wrap="square" lIns="0" tIns="0" rIns="0" bIns="0" rtlCol="0" anchor="ctr"/>
+          <a:lstStyle/>
+          <a:p>
+            <a:pPr algn="ctr" indent="0" marL="0">
+              <a:buNone/>
+            </a:pPr>
+            <a:r>
+              <a:rPr lang="en-US" sz="1400" b="1" dirty="0">
+                <a:solidFill>
+                  <a:srgbClr val="22D3EE"/>
+                </a:solidFill>
+                <a:latin typeface="Calibri" pitchFamily="34" charset="0"/>
+                <a:ea typeface="Calibri" pitchFamily="34" charset="-122"/>
+                <a:cs typeface="Calibri" pitchFamily="34" charset="-120"/>
+              </a:rPr>
+              <a:t>Satanic Panic</a:t>
+            </a:r>
+            <a:endParaRPr lang="en-US" sz="1400" dirty="0"/>
+          </a:p>
+        </p:txBody>
+      </p:sp>
+      <p:sp>
+        <p:nvSpPr>
+          <p:cNvPr id="19" name="Text 17"/>
+          <p:cNvSpPr/>
+          <p:nvPr/>
+        </p:nvSpPr>
+        <p:spPr>
+          <a:xfrm>
+            <a:off x="6080760" y="1828800"/>
+            <a:ext cx="2606040" cy="502920"/>
+          </a:xfrm>
+          <a:prstGeom prst="rect">
+            <a:avLst/>
+          </a:prstGeom>
+          <a:noFill/>
+          <a:ln/>
+        </p:spPr>
+        <p:txBody>
+          <a:bodyPr wrap="square" lIns="0" tIns="0" rIns="0" bIns="0" rtlCol="0" anchor="ctr"/>
+          <a:lstStyle/>
+          <a:p>
+            <a:pPr algn="ctr" indent="0" marL="0">
+              <a:buNone/>
+            </a:pPr>
+            <a:r>
+              <a:rPr lang="en-US" sz="4000" b="1" dirty="0">
+                <a:solidFill>
+                  <a:srgbClr val="D97706"/>
+                </a:solidFill>
+                <a:latin typeface="Georgia" pitchFamily="34" charset="0"/>
+                <a:ea typeface="Georgia" pitchFamily="34" charset="-122"/>
+                <a:cs typeface="Georgia" pitchFamily="34" charset="-120"/>
+              </a:rPr>
+              <a:t>12,000+</a:t>
+            </a:r>
+            <a:endParaRPr lang="en-US" sz="4000" dirty="0"/>
+          </a:p>
+        </p:txBody>
+      </p:sp>
+      <p:sp>
+        <p:nvSpPr>
+          <p:cNvPr id="20" name="Text 18"/>
+          <p:cNvSpPr/>
+          <p:nvPr/>
+        </p:nvSpPr>
+        <p:spPr>
+          <a:xfrm>
+            <a:off x="6263640" y="2331720"/>
+            <a:ext cx="2240280" cy="457200"/>
+          </a:xfrm>
+          <a:prstGeom prst="rect">
+            <a:avLst/>
+          </a:prstGeom>
+          <a:noFill/>
+          <a:ln/>
+        </p:spPr>
+        <p:txBody>
+          <a:bodyPr wrap="square" lIns="0" tIns="0" rIns="0" bIns="0" rtlCol="0" anchor="ctr"/>
+          <a:lstStyle/>
+          <a:p>
+            <a:pPr algn="ctr" indent="0" marL="0">
+              <a:buNone/>
+            </a:pPr>
+            <a:r>
+              <a:rPr lang="en-US" sz="1200" dirty="0">
+                <a:solidFill>
+                  <a:srgbClr val="94A3B8"/>
+                </a:solidFill>
+                <a:latin typeface="Calibri" pitchFamily="34" charset="0"/>
+                <a:ea typeface="Calibri" pitchFamily="34" charset="-122"/>
+                <a:cs typeface="Calibri" pitchFamily="34" charset="-120"/>
+              </a:rPr>
+              <a:t>cases alleged</a:t>
+            </a:r>
+            <a:endParaRPr lang="en-US" sz="1200" dirty="0"/>
+          </a:p>
+        </p:txBody>
+      </p:sp>
+      <p:sp>
+        <p:nvSpPr>
+          <p:cNvPr id="21" name="Text 19"/>
+          <p:cNvSpPr/>
+          <p:nvPr/>
+        </p:nvSpPr>
+        <p:spPr>
+          <a:xfrm>
+            <a:off x="6263640" y="2880360"/>
+            <a:ext cx="2240280" cy="640080"/>
+          </a:xfrm>
+          <a:prstGeom prst="rect">
+            <a:avLst/>
+          </a:prstGeom>
+          <a:noFill/>
+          <a:ln/>
+        </p:spPr>
+        <p:txBody>
+          <a:bodyPr wrap="square" lIns="0" tIns="0" rIns="0" bIns="0" rtlCol="0" anchor="ctr"/>
+          <a:lstStyle/>
+          <a:p>
+            <a:pPr algn="ctr" indent="0" marL="0">
+              <a:lnSpc>
+                <a:spcPct val="130000"/>
+              </a:lnSpc>
+              <a:buNone/>
+            </a:pPr>
+            <a:r>
+              <a:rPr lang="en-US" sz="1100" dirty="0">
+                <a:solidFill>
+                  <a:srgbClr val="94A3B8"/>
+                </a:solidFill>
+                <a:latin typeface="Calibri" pitchFamily="34" charset="0"/>
+                <a:ea typeface="Calibri" pitchFamily="34" charset="-122"/>
+                <a:cs typeface="Calibri" pitchFamily="34" charset="-120"/>
+              </a:rPr>
+              <a:t>McMartin: 7 yrs, $15M,</a:t>
+            </a:r>
+            <a:endParaRPr lang="en-US" sz="1100" dirty="0"/>
+          </a:p>
+          <a:p>
+            <a:pPr algn="ctr" indent="0" marL="0">
+              <a:lnSpc>
+                <a:spcPct val="130000"/>
+              </a:lnSpc>
+              <a:buNone/>
+            </a:pPr>
+            <a:r>
+              <a:rPr lang="en-US" sz="1100" dirty="0">
+                <a:solidFill>
+                  <a:srgbClr val="94A3B8"/>
+                </a:solidFill>
+                <a:latin typeface="Calibri" pitchFamily="34" charset="0"/>
+                <a:ea typeface="Calibri" pitchFamily="34" charset="-122"/>
+                <a:cs typeface="Calibri" pitchFamily="34" charset="-120"/>
+              </a:rPr>
+              <a:t>zero convictions.</a:t>
+            </a:r>
+            <a:endParaRPr lang="en-US" sz="1100" dirty="0"/>
+          </a:p>
+          <a:p>
+            <a:pPr algn="ctr" indent="0" marL="0">
+              <a:lnSpc>
+                <a:spcPct val="130000"/>
+              </a:lnSpc>
+              <a:buNone/>
+            </a:pPr>
+            <a:r>
+              <a:rPr lang="en-US" sz="1100" dirty="0">
+                <a:solidFill>
+                  <a:srgbClr val="94A3B8"/>
+                </a:solidFill>
+                <a:latin typeface="Calibri" pitchFamily="34" charset="0"/>
+                <a:ea typeface="Calibri" pitchFamily="34" charset="-122"/>
+                <a:cs typeface="Calibri" pitchFamily="34" charset="-120"/>
+              </a:rPr>
+              <a:t>FBI: zero evidence.</a:t>
+            </a:r>
+            <a:endParaRPr lang="en-US" sz="1100" dirty="0"/>
+          </a:p>
+        </p:txBody>
+      </p:sp>
+      <p:sp>
+        <p:nvSpPr>
+          <p:cNvPr id="22" name="Text 20"/>
+          <p:cNvSpPr/>
+          <p:nvPr/>
+        </p:nvSpPr>
+        <p:spPr>
+          <a:xfrm>
+            <a:off x="731520" y="4114800"/>
+            <a:ext cx="7680960" cy="457200"/>
+          </a:xfrm>
+          <a:prstGeom prst="rect">
+            <a:avLst/>
+          </a:prstGeom>
+          <a:noFill/>
+          <a:ln/>
+        </p:spPr>
+        <p:txBody>
+          <a:bodyPr wrap="square" lIns="0" tIns="0" rIns="0" bIns="0" rtlCol="0" anchor="ctr"/>
+          <a:lstStyle/>
+          <a:p>
+            <a:pPr indent="0" marL="0">
+              <a:buNone/>
+            </a:pPr>
+            <a:r>
+              <a:rPr lang="en-US" sz="1300" dirty="0">
+                <a:solidFill>
+                  <a:srgbClr val="94A3B8"/>
+                </a:solidFill>
+                <a:latin typeface="Calibri" pitchFamily="34" charset="0"/>
+                <a:ea typeface="Calibri" pitchFamily="34" charset="-122"/>
+                <a:cs typeface="Calibri" pitchFamily="34" charset="-120"/>
+              </a:rPr>
+              <a:t>All three fell together. False Memory Syndrome Foundation (1992). Malpractice suits, license revocations.</a:t>
             </a:r>
             <a:endParaRPr lang="en-US" sz="1300" dirty="0"/>
           </a:p>
@@ -6913,7 +7286,7 @@
                 <a:ea typeface="Georgia" pitchFamily="34" charset="-122"/>
                 <a:cs typeface="Georgia" pitchFamily="34" charset="-120"/>
               </a:rPr>
-              <a:t>IV</a:t>
+              <a:t>V</a:t>
             </a:r>
             <a:endParaRPr lang="en-US" sz="4800" dirty="0"/>
           </a:p>
@@ -8461,7 +8834,7 @@
     <p:bg>
       <p:bgPr>
         <a:solidFill>
-          <a:srgbClr val="0E7490"/>
+          <a:srgbClr val="0F1B2D"/>
         </a:solidFill>
       </p:bgPr>
     </p:bg>
@@ -8487,24 +8860,24 @@
         </p:nvSpPr>
         <p:spPr>
           <a:xfrm>
-            <a:off x="731520" y="1097280"/>
-            <a:ext cx="1097280" cy="1097280"/>
-          </a:xfrm>
-          <a:prstGeom prst="rect">
-            <a:avLst/>
-          </a:prstGeom>
-          <a:noFill/>
-          <a:ln/>
-        </p:spPr>
-        <p:txBody>
-          <a:bodyPr wrap="square" lIns="0" tIns="0" rIns="0" bIns="0" rtlCol="0" anchor="ctr"/>
-          <a:lstStyle/>
-          <a:p>
-            <a:pPr algn="ctr" indent="0" marL="0">
-              <a:buNone/>
-            </a:pPr>
-            <a:r>
-              <a:rPr lang="en-US" sz="4800" b="1" dirty="0">
+            <a:off x="731520" y="731520"/>
+            <a:ext cx="7680960" cy="731520"/>
+          </a:xfrm>
+          <a:prstGeom prst="rect">
+            <a:avLst/>
+          </a:prstGeom>
+          <a:noFill/>
+          <a:ln/>
+        </p:spPr>
+        <p:txBody>
+          <a:bodyPr wrap="square" lIns="0" tIns="0" rIns="0" bIns="0" rtlCol="0" anchor="ctr"/>
+          <a:lstStyle/>
+          <a:p>
+            <a:pPr indent="0" marL="0">
+              <a:buNone/>
+            </a:pPr>
+            <a:r>
+              <a:rPr lang="en-US" sz="3000" b="1" dirty="0">
                 <a:solidFill>
                   <a:srgbClr val="FFFFFF"/>
                 </a:solidFill>
@@ -8512,42 +8885,22 @@
                 <a:ea typeface="Georgia" pitchFamily="34" charset="-122"/>
                 <a:cs typeface="Georgia" pitchFamily="34" charset="-120"/>
               </a:rPr>
-              <a:t>I</a:t>
-            </a:r>
-            <a:endParaRPr lang="en-US" sz="4800" dirty="0"/>
-          </a:p>
-        </p:txBody>
-      </p:sp>
-      <p:sp>
-        <p:nvSpPr>
-          <p:cNvPr id="3" name="Shape 1"/>
-          <p:cNvSpPr/>
-          <p:nvPr/>
-        </p:nvSpPr>
-        <p:spPr>
-          <a:xfrm>
-            <a:off x="2011680" y="1371600"/>
-            <a:ext cx="36576" cy="640080"/>
-          </a:xfrm>
-          <a:prstGeom prst="rect">
-            <a:avLst/>
-          </a:prstGeom>
-          <a:solidFill>
-            <a:srgbClr val="22D3EE"/>
-          </a:solidFill>
-          <a:ln/>
-        </p:spPr>
-      </p:sp>
-      <p:sp>
-        <p:nvSpPr>
-          <p:cNvPr id="4" name="Text 2"/>
-          <p:cNvSpPr/>
-          <p:nvPr/>
-        </p:nvSpPr>
-        <p:spPr>
-          <a:xfrm>
-            <a:off x="2286000" y="1005840"/>
-            <a:ext cx="5486400" cy="1188720"/>
+              <a:t>Materials &amp; Sources Online</a:t>
+            </a:r>
+            <a:endParaRPr lang="en-US" sz="3000" dirty="0"/>
+          </a:p>
+        </p:txBody>
+      </p:sp>
+      <p:sp>
+        <p:nvSpPr>
+          <p:cNvPr id="3" name="Text 1"/>
+          <p:cNvSpPr/>
+          <p:nvPr/>
+        </p:nvSpPr>
+        <p:spPr>
+          <a:xfrm>
+            <a:off x="731520" y="1645920"/>
+            <a:ext cx="7680960" cy="731520"/>
           </a:xfrm>
           <a:prstGeom prst="rect">
             <a:avLst/>
@@ -8561,81 +8914,121 @@
           <a:p>
             <a:pPr indent="0" marL="0">
               <a:lnSpc>
-                <a:spcPct val="110000"/>
+                <a:spcPct val="150000"/>
               </a:lnSpc>
               <a:buNone/>
             </a:pPr>
             <a:r>
-              <a:rPr lang="en-US" sz="3600" b="1" dirty="0">
-                <a:solidFill>
-                  <a:srgbClr val="FFFFFF"/>
-                </a:solidFill>
-                <a:latin typeface="Georgia" pitchFamily="34" charset="0"/>
-                <a:ea typeface="Georgia" pitchFamily="34" charset="-122"/>
-                <a:cs typeface="Georgia" pitchFamily="34" charset="-120"/>
-              </a:rPr>
-              <a:t>The Engineer's</a:t>
-            </a:r>
-            <a:endParaRPr lang="en-US" sz="3600" dirty="0"/>
-          </a:p>
-          <a:p>
-            <a:pPr indent="0" marL="0">
-              <a:lnSpc>
-                <a:spcPct val="110000"/>
-              </a:lnSpc>
-              <a:buNone/>
-            </a:pPr>
-            <a:r>
-              <a:rPr lang="en-US" sz="3600" b="1" dirty="0">
-                <a:solidFill>
-                  <a:srgbClr val="FFFFFF"/>
-                </a:solidFill>
-                <a:latin typeface="Georgia" pitchFamily="34" charset="0"/>
-                <a:ea typeface="Georgia" pitchFamily="34" charset="-122"/>
-                <a:cs typeface="Georgia" pitchFamily="34" charset="-120"/>
-              </a:rPr>
-              <a:t>Confession</a:t>
-            </a:r>
-            <a:endParaRPr lang="en-US" sz="3600" dirty="0"/>
-          </a:p>
-        </p:txBody>
-      </p:sp>
-      <p:sp>
-        <p:nvSpPr>
-          <p:cNvPr id="5" name="Text 3"/>
-          <p:cNvSpPr/>
-          <p:nvPr/>
-        </p:nvSpPr>
-        <p:spPr>
-          <a:xfrm>
-            <a:off x="731520" y="4389120"/>
-            <a:ext cx="2743200" cy="365760"/>
-          </a:xfrm>
-          <a:prstGeom prst="rect">
-            <a:avLst/>
-          </a:prstGeom>
-          <a:noFill/>
-          <a:ln/>
-        </p:spPr>
-        <p:txBody>
-          <a:bodyPr wrap="square" lIns="0" tIns="0" rIns="0" bIns="0" rtlCol="0" anchor="ctr"/>
-          <a:lstStyle/>
-          <a:p>
-            <a:pPr indent="0" marL="0">
-              <a:buNone/>
-            </a:pPr>
-            <a:r>
-              <a:rPr lang="en-US" sz="1300" i="1" dirty="0">
-                <a:solidFill>
-                  <a:srgbClr val="22D3EE"/>
+              <a:rPr lang="en-US" sz="1600" dirty="0">
+                <a:solidFill>
+                  <a:srgbClr val="94A3B8"/>
                 </a:solidFill>
                 <a:latin typeface="Calibri" pitchFamily="34" charset="0"/>
                 <a:ea typeface="Calibri" pitchFamily="34" charset="-122"/>
                 <a:cs typeface="Calibri" pitchFamily="34" charset="-120"/>
               </a:rPr>
-              <a:t>3 minutes</a:t>
-            </a:r>
-            <a:endParaRPr lang="en-US" sz="1300" dirty="0"/>
+              <a:t>All notes and sources for today's presentations are available online.</a:t>
+            </a:r>
+            <a:endParaRPr lang="en-US" sz="1600" dirty="0"/>
+          </a:p>
+          <a:p>
+            <a:pPr indent="0" marL="0">
+              <a:lnSpc>
+                <a:spcPct val="150000"/>
+              </a:lnSpc>
+              <a:buNone/>
+            </a:pPr>
+            <a:r>
+              <a:rPr lang="en-US" sz="1600" dirty="0">
+                <a:solidFill>
+                  <a:srgbClr val="94A3B8"/>
+                </a:solidFill>
+                <a:latin typeface="Calibri" pitchFamily="34" charset="0"/>
+                <a:ea typeface="Calibri" pitchFamily="34" charset="-122"/>
+                <a:cs typeface="Calibri" pitchFamily="34" charset="-120"/>
+              </a:rPr>
+              <a:t>Follow along, review later, or share with colleagues.</a:t>
+            </a:r>
+            <a:endParaRPr lang="en-US" sz="1600" dirty="0"/>
+          </a:p>
+        </p:txBody>
+      </p:sp>
+      <p:sp>
+        <p:nvSpPr>
+          <p:cNvPr id="4" name="Shape 2"/>
+          <p:cNvSpPr/>
+          <p:nvPr/>
+        </p:nvSpPr>
+        <p:spPr>
+          <a:xfrm>
+            <a:off x="1371600" y="2743200"/>
+            <a:ext cx="6400800" cy="1097280"/>
+          </a:xfrm>
+          <a:prstGeom prst="rect">
+            <a:avLst/>
+          </a:prstGeom>
+          <a:solidFill>
+            <a:srgbClr val="1B2A4A"/>
+          </a:solidFill>
+          <a:ln/>
+        </p:spPr>
+      </p:sp>
+      <p:sp>
+        <p:nvSpPr>
+          <p:cNvPr id="5" name="Shape 3"/>
+          <p:cNvSpPr/>
+          <p:nvPr/>
+        </p:nvSpPr>
+        <p:spPr>
+          <a:xfrm>
+            <a:off x="1371600" y="2743200"/>
+            <a:ext cx="6400800" cy="54864"/>
+          </a:xfrm>
+          <a:prstGeom prst="rect">
+            <a:avLst/>
+          </a:prstGeom>
+          <a:solidFill>
+            <a:srgbClr val="0891B2"/>
+          </a:solidFill>
+          <a:ln/>
+        </p:spPr>
+      </p:sp>
+      <p:sp>
+        <p:nvSpPr>
+          <p:cNvPr id="6" name="Text 4"/>
+          <p:cNvSpPr/>
+          <p:nvPr/>
+        </p:nvSpPr>
+        <p:spPr>
+          <a:xfrm>
+            <a:off x="1371600" y="2834640"/>
+            <a:ext cx="6400800" cy="914400"/>
+          </a:xfrm>
+          <a:prstGeom prst="rect">
+            <a:avLst/>
+          </a:prstGeom>
+          <a:noFill/>
+          <a:ln/>
+        </p:spPr>
+        <p:txBody>
+          <a:bodyPr wrap="square" lIns="0" tIns="0" rIns="0" bIns="0" rtlCol="0" anchor="ctr"/>
+          <a:lstStyle/>
+          <a:p>
+            <a:pPr algn="ctr" indent="0" marL="0">
+              <a:buNone/>
+            </a:pPr>
+            <a:r>
+              <a:rPr lang="en-US" sz="2400" b="1" dirty="0">
+                <a:solidFill>
+                  <a:srgbClr val="22D3EE"/>
+                </a:solidFill>
+                <a:latin typeface="Calibri" pitchFamily="34" charset="0"/>
+                <a:ea typeface="Calibri" pitchFamily="34" charset="-122"/>
+                <a:cs typeface="Calibri" pitchFamily="34" charset="-120"/>
+              </a:rPr>
+              <a:t>github.com/patrickkidd/ffrn-2026</a:t>
+            </a:r>
+            <a:endParaRPr lang="en-US" sz="2400" dirty="0"/>
           </a:p>
         </p:txBody>
       </p:sp>
@@ -8704,7 +9097,7 @@
                 <a:ea typeface="Georgia" pitchFamily="34" charset="-122"/>
                 <a:cs typeface="Georgia" pitchFamily="34" charset="-120"/>
               </a:rPr>
-              <a:t>V</a:t>
+              <a:t>VI</a:t>
             </a:r>
             <a:endParaRPr lang="en-US" sz="4800" dirty="0"/>
           </a:p>
@@ -11112,7 +11505,7 @@
                 <a:ea typeface="Georgia" pitchFamily="34" charset="-122"/>
                 <a:cs typeface="Georgia" pitchFamily="34" charset="-120"/>
               </a:rPr>
-              <a:t>The Field</a:t>
+              <a:t>The Engineer's</a:t>
             </a:r>
             <a:endParaRPr lang="en-US" sz="3600" dirty="0"/>
           </a:p>
@@ -11132,7 +11525,7 @@
                 <a:ea typeface="Georgia" pitchFamily="34" charset="-122"/>
                 <a:cs typeface="Georgia" pitchFamily="34" charset="-120"/>
               </a:rPr>
-              <a:t>Is Broken</a:t>
+              <a:t>Confession</a:t>
             </a:r>
             <a:endParaRPr lang="en-US" sz="3600" dirty="0"/>
           </a:p>
@@ -11171,7 +11564,7 @@
                 <a:ea typeface="Calibri" pitchFamily="34" charset="-122"/>
                 <a:cs typeface="Calibri" pitchFamily="34" charset="-120"/>
               </a:rPr>
-              <a:t>8 minutes</a:t>
+              <a:t>3 minutes</a:t>
             </a:r>
             <a:endParaRPr lang="en-US" sz="1300" dirty="0"/>
           </a:p>
@@ -11188,6 +11581,198 @@
 <file path=ppt/slides/slide4.xml><?xml version="1.0" encoding="utf-8"?>
 <p:sld xmlns:a="http://schemas.openxmlformats.org/drawingml/2006/main" xmlns:r="http://schemas.openxmlformats.org/officeDocument/2006/relationships" xmlns:p="http://schemas.openxmlformats.org/presentationml/2006/main">
   <p:cSld name="Slide 4">
+    <p:bg>
+      <p:bgPr>
+        <a:solidFill>
+          <a:srgbClr val="0E7490"/>
+        </a:solidFill>
+      </p:bgPr>
+    </p:bg>
+    <p:spTree>
+      <p:nvGrpSpPr>
+        <p:cNvPr id="1" name=""/>
+        <p:cNvGrpSpPr/>
+        <p:nvPr/>
+      </p:nvGrpSpPr>
+      <p:grpSpPr>
+        <a:xfrm>
+          <a:off x="0" y="0"/>
+          <a:ext cx="0" cy="0"/>
+          <a:chOff x="0" y="0"/>
+          <a:chExt cx="0" cy="0"/>
+        </a:xfrm>
+      </p:grpSpPr>
+      <p:sp>
+        <p:nvSpPr>
+          <p:cNvPr id="2" name="Text 0"/>
+          <p:cNvSpPr/>
+          <p:nvPr/>
+        </p:nvSpPr>
+        <p:spPr>
+          <a:xfrm>
+            <a:off x="731520" y="1097280"/>
+            <a:ext cx="1097280" cy="1097280"/>
+          </a:xfrm>
+          <a:prstGeom prst="rect">
+            <a:avLst/>
+          </a:prstGeom>
+          <a:noFill/>
+          <a:ln/>
+        </p:spPr>
+        <p:txBody>
+          <a:bodyPr wrap="square" lIns="0" tIns="0" rIns="0" bIns="0" rtlCol="0" anchor="ctr"/>
+          <a:lstStyle/>
+          <a:p>
+            <a:pPr algn="ctr" indent="0" marL="0">
+              <a:buNone/>
+            </a:pPr>
+            <a:r>
+              <a:rPr lang="en-US" sz="4800" b="1" dirty="0">
+                <a:solidFill>
+                  <a:srgbClr val="FFFFFF"/>
+                </a:solidFill>
+                <a:latin typeface="Georgia" pitchFamily="34" charset="0"/>
+                <a:ea typeface="Georgia" pitchFamily="34" charset="-122"/>
+                <a:cs typeface="Georgia" pitchFamily="34" charset="-120"/>
+              </a:rPr>
+              <a:t>III</a:t>
+            </a:r>
+            <a:endParaRPr lang="en-US" sz="4800" dirty="0"/>
+          </a:p>
+        </p:txBody>
+      </p:sp>
+      <p:sp>
+        <p:nvSpPr>
+          <p:cNvPr id="3" name="Shape 1"/>
+          <p:cNvSpPr/>
+          <p:nvPr/>
+        </p:nvSpPr>
+        <p:spPr>
+          <a:xfrm>
+            <a:off x="2011680" y="1371600"/>
+            <a:ext cx="36576" cy="640080"/>
+          </a:xfrm>
+          <a:prstGeom prst="rect">
+            <a:avLst/>
+          </a:prstGeom>
+          <a:solidFill>
+            <a:srgbClr val="22D3EE"/>
+          </a:solidFill>
+          <a:ln/>
+        </p:spPr>
+      </p:sp>
+      <p:sp>
+        <p:nvSpPr>
+          <p:cNvPr id="4" name="Text 2"/>
+          <p:cNvSpPr/>
+          <p:nvPr/>
+        </p:nvSpPr>
+        <p:spPr>
+          <a:xfrm>
+            <a:off x="2286000" y="1005840"/>
+            <a:ext cx="5486400" cy="1188720"/>
+          </a:xfrm>
+          <a:prstGeom prst="rect">
+            <a:avLst/>
+          </a:prstGeom>
+          <a:noFill/>
+          <a:ln/>
+        </p:spPr>
+        <p:txBody>
+          <a:bodyPr wrap="square" lIns="0" tIns="0" rIns="0" bIns="0" rtlCol="0" anchor="ctr"/>
+          <a:lstStyle/>
+          <a:p>
+            <a:pPr indent="0" marL="0">
+              <a:lnSpc>
+                <a:spcPct val="110000"/>
+              </a:lnSpc>
+              <a:buNone/>
+            </a:pPr>
+            <a:r>
+              <a:rPr lang="en-US" sz="3600" b="1" dirty="0">
+                <a:solidFill>
+                  <a:srgbClr val="FFFFFF"/>
+                </a:solidFill>
+                <a:latin typeface="Georgia" pitchFamily="34" charset="0"/>
+                <a:ea typeface="Georgia" pitchFamily="34" charset="-122"/>
+                <a:cs typeface="Georgia" pitchFamily="34" charset="-120"/>
+              </a:rPr>
+              <a:t>The Field</a:t>
+            </a:r>
+            <a:endParaRPr lang="en-US" sz="3600" dirty="0"/>
+          </a:p>
+          <a:p>
+            <a:pPr indent="0" marL="0">
+              <a:lnSpc>
+                <a:spcPct val="110000"/>
+              </a:lnSpc>
+              <a:buNone/>
+            </a:pPr>
+            <a:r>
+              <a:rPr lang="en-US" sz="3600" b="1" dirty="0">
+                <a:solidFill>
+                  <a:srgbClr val="FFFFFF"/>
+                </a:solidFill>
+                <a:latin typeface="Georgia" pitchFamily="34" charset="0"/>
+                <a:ea typeface="Georgia" pitchFamily="34" charset="-122"/>
+                <a:cs typeface="Georgia" pitchFamily="34" charset="-120"/>
+              </a:rPr>
+              <a:t>Is Broken</a:t>
+            </a:r>
+            <a:endParaRPr lang="en-US" sz="3600" dirty="0"/>
+          </a:p>
+        </p:txBody>
+      </p:sp>
+      <p:sp>
+        <p:nvSpPr>
+          <p:cNvPr id="5" name="Text 3"/>
+          <p:cNvSpPr/>
+          <p:nvPr/>
+        </p:nvSpPr>
+        <p:spPr>
+          <a:xfrm>
+            <a:off x="731520" y="4389120"/>
+            <a:ext cx="2743200" cy="365760"/>
+          </a:xfrm>
+          <a:prstGeom prst="rect">
+            <a:avLst/>
+          </a:prstGeom>
+          <a:noFill/>
+          <a:ln/>
+        </p:spPr>
+        <p:txBody>
+          <a:bodyPr wrap="square" lIns="0" tIns="0" rIns="0" bIns="0" rtlCol="0" anchor="ctr"/>
+          <a:lstStyle/>
+          <a:p>
+            <a:pPr indent="0" marL="0">
+              <a:buNone/>
+            </a:pPr>
+            <a:r>
+              <a:rPr lang="en-US" sz="1300" i="1" dirty="0">
+                <a:solidFill>
+                  <a:srgbClr val="22D3EE"/>
+                </a:solidFill>
+                <a:latin typeface="Calibri" pitchFamily="34" charset="0"/>
+                <a:ea typeface="Calibri" pitchFamily="34" charset="-122"/>
+                <a:cs typeface="Calibri" pitchFamily="34" charset="-120"/>
+              </a:rPr>
+              <a:t>8 minutes</a:t>
+            </a:r>
+            <a:endParaRPr lang="en-US" sz="1300" dirty="0"/>
+          </a:p>
+        </p:txBody>
+      </p:sp>
+    </p:spTree>
+  </p:cSld>
+  <p:clrMapOvr>
+    <a:masterClrMapping/>
+  </p:clrMapOvr>
+</p:sld>
+</file>
+
+<file path=ppt/slides/slide5.xml><?xml version="1.0" encoding="utf-8"?>
+<p:sld xmlns:a="http://schemas.openxmlformats.org/drawingml/2006/main" xmlns:r="http://schemas.openxmlformats.org/officeDocument/2006/relationships" xmlns:p="http://schemas.openxmlformats.org/presentationml/2006/main">
+  <p:cSld name="Slide 5">
     <p:bg>
       <p:bgPr>
         <a:solidFill>
@@ -11638,9 +12223,9 @@
 </p:sld>
 </file>
 
-<file path=ppt/slides/slide5.xml><?xml version="1.0" encoding="utf-8"?>
+<file path=ppt/slides/slide6.xml><?xml version="1.0" encoding="utf-8"?>
 <p:sld xmlns:a="http://schemas.openxmlformats.org/drawingml/2006/main" xmlns:r="http://schemas.openxmlformats.org/officeDocument/2006/relationships" xmlns:p="http://schemas.openxmlformats.org/presentationml/2006/main">
-  <p:cSld name="Slide 5">
+  <p:cSld name="Slide 6">
     <p:bg>
       <p:bgPr>
         <a:solidFill>
@@ -12076,9 +12661,9 @@
 </p:sld>
 </file>
 
-<file path=ppt/slides/slide6.xml><?xml version="1.0" encoding="utf-8"?>
+<file path=ppt/slides/slide7.xml><?xml version="1.0" encoding="utf-8"?>
 <p:sld xmlns:a="http://schemas.openxmlformats.org/drawingml/2006/main" xmlns:r="http://schemas.openxmlformats.org/officeDocument/2006/relationships" xmlns:p="http://schemas.openxmlformats.org/presentationml/2006/main">
-  <p:cSld name="Slide 6">
+  <p:cSld name="Slide 7">
     <p:bg>
       <p:bgPr>
         <a:solidFill>
@@ -12561,9 +13146,9 @@
 </p:sld>
 </file>
 
-<file path=ppt/slides/slide7.xml><?xml version="1.0" encoding="utf-8"?>
+<file path=ppt/slides/slide8.xml><?xml version="1.0" encoding="utf-8"?>
 <p:sld xmlns:a="http://schemas.openxmlformats.org/drawingml/2006/main" xmlns:r="http://schemas.openxmlformats.org/officeDocument/2006/relationships" xmlns:p="http://schemas.openxmlformats.org/presentationml/2006/main">
-  <p:cSld name="Slide 7">
+  <p:cSld name="Slide 8">
     <p:bg>
       <p:bgPr>
         <a:solidFill>
@@ -12852,9 +13437,9 @@
 </p:sld>
 </file>
 
-<file path=ppt/slides/slide8.xml><?xml version="1.0" encoding="utf-8"?>
+<file path=ppt/slides/slide9.xml><?xml version="1.0" encoding="utf-8"?>
 <p:sld xmlns:a="http://schemas.openxmlformats.org/drawingml/2006/main" xmlns:r="http://schemas.openxmlformats.org/officeDocument/2006/relationships" xmlns:p="http://schemas.openxmlformats.org/presentationml/2006/main">
-  <p:cSld name="Slide 8">
+  <p:cSld name="Slide 9">
     <p:bg>
       <p:bgPr>
         <a:solidFill>
@@ -13326,198 +13911,6 @@
               <a:t>This skepticism has a basis.</a:t>
             </a:r>
             <a:endParaRPr lang="en-US" sz="1800" dirty="0"/>
-          </a:p>
-        </p:txBody>
-      </p:sp>
-    </p:spTree>
-  </p:cSld>
-  <p:clrMapOvr>
-    <a:masterClrMapping/>
-  </p:clrMapOvr>
-</p:sld>
-</file>
-
-<file path=ppt/slides/slide9.xml><?xml version="1.0" encoding="utf-8"?>
-<p:sld xmlns:a="http://schemas.openxmlformats.org/drawingml/2006/main" xmlns:r="http://schemas.openxmlformats.org/officeDocument/2006/relationships" xmlns:p="http://schemas.openxmlformats.org/presentationml/2006/main">
-  <p:cSld name="Slide 9">
-    <p:bg>
-      <p:bgPr>
-        <a:solidFill>
-          <a:srgbClr val="0E7490"/>
-        </a:solidFill>
-      </p:bgPr>
-    </p:bg>
-    <p:spTree>
-      <p:nvGrpSpPr>
-        <p:cNvPr id="1" name=""/>
-        <p:cNvGrpSpPr/>
-        <p:nvPr/>
-      </p:nvGrpSpPr>
-      <p:grpSpPr>
-        <a:xfrm>
-          <a:off x="0" y="0"/>
-          <a:ext cx="0" cy="0"/>
-          <a:chOff x="0" y="0"/>
-          <a:chExt cx="0" cy="0"/>
-        </a:xfrm>
-      </p:grpSpPr>
-      <p:sp>
-        <p:nvSpPr>
-          <p:cNvPr id="2" name="Text 0"/>
-          <p:cNvSpPr/>
-          <p:nvPr/>
-        </p:nvSpPr>
-        <p:spPr>
-          <a:xfrm>
-            <a:off x="731520" y="1097280"/>
-            <a:ext cx="1097280" cy="1097280"/>
-          </a:xfrm>
-          <a:prstGeom prst="rect">
-            <a:avLst/>
-          </a:prstGeom>
-          <a:noFill/>
-          <a:ln/>
-        </p:spPr>
-        <p:txBody>
-          <a:bodyPr wrap="square" lIns="0" tIns="0" rIns="0" bIns="0" rtlCol="0" anchor="ctr"/>
-          <a:lstStyle/>
-          <a:p>
-            <a:pPr algn="ctr" indent="0" marL="0">
-              <a:buNone/>
-            </a:pPr>
-            <a:r>
-              <a:rPr lang="en-US" sz="4800" b="1" dirty="0">
-                <a:solidFill>
-                  <a:srgbClr val="FFFFFF"/>
-                </a:solidFill>
-                <a:latin typeface="Georgia" pitchFamily="34" charset="0"/>
-                <a:ea typeface="Georgia" pitchFamily="34" charset="-122"/>
-                <a:cs typeface="Georgia" pitchFamily="34" charset="-120"/>
-              </a:rPr>
-              <a:t>III</a:t>
-            </a:r>
-            <a:endParaRPr lang="en-US" sz="4800" dirty="0"/>
-          </a:p>
-        </p:txBody>
-      </p:sp>
-      <p:sp>
-        <p:nvSpPr>
-          <p:cNvPr id="3" name="Shape 1"/>
-          <p:cNvSpPr/>
-          <p:nvPr/>
-        </p:nvSpPr>
-        <p:spPr>
-          <a:xfrm>
-            <a:off x="2011680" y="1371600"/>
-            <a:ext cx="36576" cy="640080"/>
-          </a:xfrm>
-          <a:prstGeom prst="rect">
-            <a:avLst/>
-          </a:prstGeom>
-          <a:solidFill>
-            <a:srgbClr val="22D3EE"/>
-          </a:solidFill>
-          <a:ln/>
-        </p:spPr>
-      </p:sp>
-      <p:sp>
-        <p:nvSpPr>
-          <p:cNvPr id="4" name="Text 2"/>
-          <p:cNvSpPr/>
-          <p:nvPr/>
-        </p:nvSpPr>
-        <p:spPr>
-          <a:xfrm>
-            <a:off x="2286000" y="1005840"/>
-            <a:ext cx="5486400" cy="1188720"/>
-          </a:xfrm>
-          <a:prstGeom prst="rect">
-            <a:avLst/>
-          </a:prstGeom>
-          <a:noFill/>
-          <a:ln/>
-        </p:spPr>
-        <p:txBody>
-          <a:bodyPr wrap="square" lIns="0" tIns="0" rIns="0" bIns="0" rtlCol="0" anchor="ctr"/>
-          <a:lstStyle/>
-          <a:p>
-            <a:pPr indent="0" marL="0">
-              <a:lnSpc>
-                <a:spcPct val="110000"/>
-              </a:lnSpc>
-              <a:buNone/>
-            </a:pPr>
-            <a:r>
-              <a:rPr lang="en-US" sz="3600" b="1" dirty="0">
-                <a:solidFill>
-                  <a:srgbClr val="FFFFFF"/>
-                </a:solidFill>
-                <a:latin typeface="Georgia" pitchFamily="34" charset="0"/>
-                <a:ea typeface="Georgia" pitchFamily="34" charset="-122"/>
-                <a:cs typeface="Georgia" pitchFamily="34" charset="-120"/>
-              </a:rPr>
-              <a:t>Historical</a:t>
-            </a:r>
-            <a:endParaRPr lang="en-US" sz="3600" dirty="0"/>
-          </a:p>
-          <a:p>
-            <a:pPr indent="0" marL="0">
-              <a:lnSpc>
-                <a:spcPct val="110000"/>
-              </a:lnSpc>
-              <a:buNone/>
-            </a:pPr>
-            <a:r>
-              <a:rPr lang="en-US" sz="3600" b="1" dirty="0">
-                <a:solidFill>
-                  <a:srgbClr val="FFFFFF"/>
-                </a:solidFill>
-                <a:latin typeface="Georgia" pitchFamily="34" charset="0"/>
-                <a:ea typeface="Georgia" pitchFamily="34" charset="-122"/>
-                <a:cs typeface="Georgia" pitchFamily="34" charset="-120"/>
-              </a:rPr>
-              <a:t>Catastrophes</a:t>
-            </a:r>
-            <a:endParaRPr lang="en-US" sz="3600" dirty="0"/>
-          </a:p>
-        </p:txBody>
-      </p:sp>
-      <p:sp>
-        <p:nvSpPr>
-          <p:cNvPr id="5" name="Text 3"/>
-          <p:cNvSpPr/>
-          <p:nvPr/>
-        </p:nvSpPr>
-        <p:spPr>
-          <a:xfrm>
-            <a:off x="731520" y="4389120"/>
-            <a:ext cx="2743200" cy="365760"/>
-          </a:xfrm>
-          <a:prstGeom prst="rect">
-            <a:avLst/>
-          </a:prstGeom>
-          <a:noFill/>
-          <a:ln/>
-        </p:spPr>
-        <p:txBody>
-          <a:bodyPr wrap="square" lIns="0" tIns="0" rIns="0" bIns="0" rtlCol="0" anchor="ctr"/>
-          <a:lstStyle/>
-          <a:p>
-            <a:pPr indent="0" marL="0">
-              <a:buNone/>
-            </a:pPr>
-            <a:r>
-              <a:rPr lang="en-US" sz="1300" i="1" dirty="0">
-                <a:solidFill>
-                  <a:srgbClr val="22D3EE"/>
-                </a:solidFill>
-                <a:latin typeface="Calibri" pitchFamily="34" charset="0"/>
-                <a:ea typeface="Calibri" pitchFamily="34" charset="-122"/>
-                <a:cs typeface="Calibri" pitchFamily="34" charset="-120"/>
-              </a:rPr>
-              <a:t>14 minutes</a:t>
-            </a:r>
-            <a:endParaRPr lang="en-US" sz="1300" dirty="0"/>
           </a:p>
         </p:txBody>
       </p:sp>
